--- a/public/videos/repositories/cosme-stock-alert/cosme-stock-alert-tech-preview.pptx
+++ b/public/videos/repositories/cosme-stock-alert/cosme-stock-alert-tech-preview.pptx
@@ -134,7 +134,7 @@
           <p:cNvPr id="2" name="タイトル 1">
             <a:extLst>
               <a:ext uri="{FF2B5EF4-FFF2-40B4-BE49-F238E27FC236}">
-                <a16:creationId xmlns:a16="http://schemas.microsoft.com/office/drawing/2014/main" id="{26F1107E-12CF-CFB1-167E-269E350F6E4F}"/>
+                <a16:creationId xmlns:a16="http://schemas.microsoft.com/office/drawing/2014/main" id="{1191C30E-E774-22C4-5738-45BB4B51680C}"/>
               </a:ext>
             </a:extLst>
           </p:cNvPr>
@@ -171,7 +171,7 @@
           <p:cNvPr id="3" name="字幕 2">
             <a:extLst>
               <a:ext uri="{FF2B5EF4-FFF2-40B4-BE49-F238E27FC236}">
-                <a16:creationId xmlns:a16="http://schemas.microsoft.com/office/drawing/2014/main" id="{F998347F-CFF8-7B81-F0A2-C43FEE557BF2}"/>
+                <a16:creationId xmlns:a16="http://schemas.microsoft.com/office/drawing/2014/main" id="{9B7DE4FC-E25D-08C5-B3FB-C72842B7FD4C}"/>
               </a:ext>
             </a:extLst>
           </p:cNvPr>
@@ -241,7 +241,7 @@
           <p:cNvPr id="4" name="日付プレースホルダー 3">
             <a:extLst>
               <a:ext uri="{FF2B5EF4-FFF2-40B4-BE49-F238E27FC236}">
-                <a16:creationId xmlns:a16="http://schemas.microsoft.com/office/drawing/2014/main" id="{91303E5D-C2D5-53BC-D3BF-44CE639E4F18}"/>
+                <a16:creationId xmlns:a16="http://schemas.microsoft.com/office/drawing/2014/main" id="{FBBDF2CA-67C2-57A3-E69C-3091273239C9}"/>
               </a:ext>
             </a:extLst>
           </p:cNvPr>
@@ -257,7 +257,7 @@
           <a:bodyPr/>
           <a:lstStyle/>
           <a:p>
-            <a:fld id="{A7588FB6-DE18-4472-9F68-5CB952117B86}" type="datetimeFigureOut">
+            <a:fld id="{67DAE527-8467-40DE-95AF-A610E0AB2909}" type="datetimeFigureOut">
               <a:rPr kumimoji="1" lang="ja-JP" altLang="en-US" smtClean="0"/>
               <a:t>2026/7/30</a:t>
             </a:fld>
@@ -270,7 +270,7 @@
           <p:cNvPr id="5" name="フッター プレースホルダー 4">
             <a:extLst>
               <a:ext uri="{FF2B5EF4-FFF2-40B4-BE49-F238E27FC236}">
-                <a16:creationId xmlns:a16="http://schemas.microsoft.com/office/drawing/2014/main" id="{4E80735A-8E5C-0427-744B-52974F98C64C}"/>
+                <a16:creationId xmlns:a16="http://schemas.microsoft.com/office/drawing/2014/main" id="{2CBF0FE3-0D3B-B55E-9CE0-C54C25D567B6}"/>
               </a:ext>
             </a:extLst>
           </p:cNvPr>
@@ -295,7 +295,7 @@
           <p:cNvPr id="6" name="スライド番号プレースホルダー 5">
             <a:extLst>
               <a:ext uri="{FF2B5EF4-FFF2-40B4-BE49-F238E27FC236}">
-                <a16:creationId xmlns:a16="http://schemas.microsoft.com/office/drawing/2014/main" id="{1BBB8E78-6E10-D18A-8AF6-DAD2190FAC8D}"/>
+                <a16:creationId xmlns:a16="http://schemas.microsoft.com/office/drawing/2014/main" id="{0BA07809-F738-4A15-B3D6-77DAEC11A2E8}"/>
               </a:ext>
             </a:extLst>
           </p:cNvPr>
@@ -311,7 +311,7 @@
           <a:bodyPr/>
           <a:lstStyle/>
           <a:p>
-            <a:fld id="{5C949883-EB21-40F9-88A0-419BC2BC6F39}" type="slidenum">
+            <a:fld id="{C342AFD4-742E-43D6-9723-44C73474E714}" type="slidenum">
               <a:rPr kumimoji="1" lang="ja-JP" altLang="en-US" smtClean="0"/>
               <a:t>‹#›</a:t>
             </a:fld>
@@ -322,7 +322,7 @@
     </p:spTree>
     <p:extLst>
       <p:ext uri="{BB962C8B-B14F-4D97-AF65-F5344CB8AC3E}">
-        <p14:creationId xmlns:p14="http://schemas.microsoft.com/office/powerpoint/2010/main" val="2958474708"/>
+        <p14:creationId xmlns:p14="http://schemas.microsoft.com/office/powerpoint/2010/main" val="1038524660"/>
       </p:ext>
     </p:extLst>
   </p:cSld>
@@ -354,7 +354,7 @@
           <p:cNvPr id="2" name="タイトル 1">
             <a:extLst>
               <a:ext uri="{FF2B5EF4-FFF2-40B4-BE49-F238E27FC236}">
-                <a16:creationId xmlns:a16="http://schemas.microsoft.com/office/drawing/2014/main" id="{0BC216E2-CFC4-9AF0-526E-3B5EE0CF93F3}"/>
+                <a16:creationId xmlns:a16="http://schemas.microsoft.com/office/drawing/2014/main" id="{330A110B-44C0-1888-4C72-40A5797FF829}"/>
               </a:ext>
             </a:extLst>
           </p:cNvPr>
@@ -382,7 +382,7 @@
           <p:cNvPr id="3" name="縦書きテキスト プレースホルダー 2">
             <a:extLst>
               <a:ext uri="{FF2B5EF4-FFF2-40B4-BE49-F238E27FC236}">
-                <a16:creationId xmlns:a16="http://schemas.microsoft.com/office/drawing/2014/main" id="{1CC39985-5363-8C88-3718-08CBCA4AA8E8}"/>
+                <a16:creationId xmlns:a16="http://schemas.microsoft.com/office/drawing/2014/main" id="{724156C2-FF61-B351-3160-C2060D00AA7A}"/>
               </a:ext>
             </a:extLst>
           </p:cNvPr>
@@ -471,7 +471,7 @@
           <p:cNvPr id="4" name="日付プレースホルダー 3">
             <a:extLst>
               <a:ext uri="{FF2B5EF4-FFF2-40B4-BE49-F238E27FC236}">
-                <a16:creationId xmlns:a16="http://schemas.microsoft.com/office/drawing/2014/main" id="{52217664-6F60-C5A7-8EFE-C40BACE6E74D}"/>
+                <a16:creationId xmlns:a16="http://schemas.microsoft.com/office/drawing/2014/main" id="{63B3C5A7-84A3-B322-2C8B-AE2C0AFFE24B}"/>
               </a:ext>
             </a:extLst>
           </p:cNvPr>
@@ -487,7 +487,7 @@
           <a:bodyPr/>
           <a:lstStyle/>
           <a:p>
-            <a:fld id="{A7588FB6-DE18-4472-9F68-5CB952117B86}" type="datetimeFigureOut">
+            <a:fld id="{67DAE527-8467-40DE-95AF-A610E0AB2909}" type="datetimeFigureOut">
               <a:rPr kumimoji="1" lang="ja-JP" altLang="en-US" smtClean="0"/>
               <a:t>2026/7/30</a:t>
             </a:fld>
@@ -500,7 +500,7 @@
           <p:cNvPr id="5" name="フッター プレースホルダー 4">
             <a:extLst>
               <a:ext uri="{FF2B5EF4-FFF2-40B4-BE49-F238E27FC236}">
-                <a16:creationId xmlns:a16="http://schemas.microsoft.com/office/drawing/2014/main" id="{DCAED560-E6A5-20C8-E3BC-CA9F90E1767A}"/>
+                <a16:creationId xmlns:a16="http://schemas.microsoft.com/office/drawing/2014/main" id="{2B2FA2EF-C6A2-62BF-EF9A-9A39E8265349}"/>
               </a:ext>
             </a:extLst>
           </p:cNvPr>
@@ -525,7 +525,7 @@
           <p:cNvPr id="6" name="スライド番号プレースホルダー 5">
             <a:extLst>
               <a:ext uri="{FF2B5EF4-FFF2-40B4-BE49-F238E27FC236}">
-                <a16:creationId xmlns:a16="http://schemas.microsoft.com/office/drawing/2014/main" id="{C55F37DD-D50A-A87E-96F2-1B0043A0B224}"/>
+                <a16:creationId xmlns:a16="http://schemas.microsoft.com/office/drawing/2014/main" id="{699CC754-0E57-F2B9-C9CB-627C9BAD4314}"/>
               </a:ext>
             </a:extLst>
           </p:cNvPr>
@@ -541,7 +541,7 @@
           <a:bodyPr/>
           <a:lstStyle/>
           <a:p>
-            <a:fld id="{5C949883-EB21-40F9-88A0-419BC2BC6F39}" type="slidenum">
+            <a:fld id="{C342AFD4-742E-43D6-9723-44C73474E714}" type="slidenum">
               <a:rPr kumimoji="1" lang="ja-JP" altLang="en-US" smtClean="0"/>
               <a:t>‹#›</a:t>
             </a:fld>
@@ -552,7 +552,7 @@
     </p:spTree>
     <p:extLst>
       <p:ext uri="{BB962C8B-B14F-4D97-AF65-F5344CB8AC3E}">
-        <p14:creationId xmlns:p14="http://schemas.microsoft.com/office/powerpoint/2010/main" val="4228308098"/>
+        <p14:creationId xmlns:p14="http://schemas.microsoft.com/office/powerpoint/2010/main" val="2969576668"/>
       </p:ext>
     </p:extLst>
   </p:cSld>
@@ -584,7 +584,7 @@
           <p:cNvPr id="2" name="縦書きタイトル 1">
             <a:extLst>
               <a:ext uri="{FF2B5EF4-FFF2-40B4-BE49-F238E27FC236}">
-                <a16:creationId xmlns:a16="http://schemas.microsoft.com/office/drawing/2014/main" id="{330CD513-E970-22E3-FEB4-8BD9B3E7031C}"/>
+                <a16:creationId xmlns:a16="http://schemas.microsoft.com/office/drawing/2014/main" id="{CC1BD3BF-4BB2-B282-757E-68744EDDC17E}"/>
               </a:ext>
             </a:extLst>
           </p:cNvPr>
@@ -617,7 +617,7 @@
           <p:cNvPr id="3" name="縦書きテキスト プレースホルダー 2">
             <a:extLst>
               <a:ext uri="{FF2B5EF4-FFF2-40B4-BE49-F238E27FC236}">
-                <a16:creationId xmlns:a16="http://schemas.microsoft.com/office/drawing/2014/main" id="{15B80854-459C-DCAB-CF1B-B9C9DF7FE951}"/>
+                <a16:creationId xmlns:a16="http://schemas.microsoft.com/office/drawing/2014/main" id="{6CAE4F8F-4A7F-BB8A-25B4-57480BBC61E3}"/>
               </a:ext>
             </a:extLst>
           </p:cNvPr>
@@ -711,7 +711,7 @@
           <p:cNvPr id="4" name="日付プレースホルダー 3">
             <a:extLst>
               <a:ext uri="{FF2B5EF4-FFF2-40B4-BE49-F238E27FC236}">
-                <a16:creationId xmlns:a16="http://schemas.microsoft.com/office/drawing/2014/main" id="{50F4A2CC-BFDA-A492-771D-2FAE90CD795F}"/>
+                <a16:creationId xmlns:a16="http://schemas.microsoft.com/office/drawing/2014/main" id="{F9FE3FE4-4308-D479-1BC4-F7A33D371CC7}"/>
               </a:ext>
             </a:extLst>
           </p:cNvPr>
@@ -727,7 +727,7 @@
           <a:bodyPr/>
           <a:lstStyle/>
           <a:p>
-            <a:fld id="{A7588FB6-DE18-4472-9F68-5CB952117B86}" type="datetimeFigureOut">
+            <a:fld id="{67DAE527-8467-40DE-95AF-A610E0AB2909}" type="datetimeFigureOut">
               <a:rPr kumimoji="1" lang="ja-JP" altLang="en-US" smtClean="0"/>
               <a:t>2026/7/30</a:t>
             </a:fld>
@@ -740,7 +740,7 @@
           <p:cNvPr id="5" name="フッター プレースホルダー 4">
             <a:extLst>
               <a:ext uri="{FF2B5EF4-FFF2-40B4-BE49-F238E27FC236}">
-                <a16:creationId xmlns:a16="http://schemas.microsoft.com/office/drawing/2014/main" id="{662820FD-0A59-4B26-324D-F8C94ADDDFBC}"/>
+                <a16:creationId xmlns:a16="http://schemas.microsoft.com/office/drawing/2014/main" id="{D2EA1811-F04B-FB42-1443-1587688CC0BF}"/>
               </a:ext>
             </a:extLst>
           </p:cNvPr>
@@ -765,7 +765,7 @@
           <p:cNvPr id="6" name="スライド番号プレースホルダー 5">
             <a:extLst>
               <a:ext uri="{FF2B5EF4-FFF2-40B4-BE49-F238E27FC236}">
-                <a16:creationId xmlns:a16="http://schemas.microsoft.com/office/drawing/2014/main" id="{89EA7CBA-9133-C4E6-062F-C50552898107}"/>
+                <a16:creationId xmlns:a16="http://schemas.microsoft.com/office/drawing/2014/main" id="{C6E071E5-5237-B9FA-8A32-CEB22EFA1C25}"/>
               </a:ext>
             </a:extLst>
           </p:cNvPr>
@@ -781,7 +781,7 @@
           <a:bodyPr/>
           <a:lstStyle/>
           <a:p>
-            <a:fld id="{5C949883-EB21-40F9-88A0-419BC2BC6F39}" type="slidenum">
+            <a:fld id="{C342AFD4-742E-43D6-9723-44C73474E714}" type="slidenum">
               <a:rPr kumimoji="1" lang="ja-JP" altLang="en-US" smtClean="0"/>
               <a:t>‹#›</a:t>
             </a:fld>
@@ -792,7 +792,7 @@
     </p:spTree>
     <p:extLst>
       <p:ext uri="{BB962C8B-B14F-4D97-AF65-F5344CB8AC3E}">
-        <p14:creationId xmlns:p14="http://schemas.microsoft.com/office/powerpoint/2010/main" val="3591422741"/>
+        <p14:creationId xmlns:p14="http://schemas.microsoft.com/office/powerpoint/2010/main" val="2854876834"/>
       </p:ext>
     </p:extLst>
   </p:cSld>
@@ -824,7 +824,7 @@
           <p:cNvPr id="2" name="タイトル 1">
             <a:extLst>
               <a:ext uri="{FF2B5EF4-FFF2-40B4-BE49-F238E27FC236}">
-                <a16:creationId xmlns:a16="http://schemas.microsoft.com/office/drawing/2014/main" id="{0D13D298-3669-FAD5-6CDD-E33292056B9F}"/>
+                <a16:creationId xmlns:a16="http://schemas.microsoft.com/office/drawing/2014/main" id="{0978AA48-A9FB-72BA-889C-446AEEE6756E}"/>
               </a:ext>
             </a:extLst>
           </p:cNvPr>
@@ -852,7 +852,7 @@
           <p:cNvPr id="3" name="コンテンツ プレースホルダー 2">
             <a:extLst>
               <a:ext uri="{FF2B5EF4-FFF2-40B4-BE49-F238E27FC236}">
-                <a16:creationId xmlns:a16="http://schemas.microsoft.com/office/drawing/2014/main" id="{5AEA152A-45F7-B123-44AB-7D65C234FAC6}"/>
+                <a16:creationId xmlns:a16="http://schemas.microsoft.com/office/drawing/2014/main" id="{6635C611-F65D-828C-2D70-F539C90CB2F5}"/>
               </a:ext>
             </a:extLst>
           </p:cNvPr>
@@ -941,7 +941,7 @@
           <p:cNvPr id="4" name="日付プレースホルダー 3">
             <a:extLst>
               <a:ext uri="{FF2B5EF4-FFF2-40B4-BE49-F238E27FC236}">
-                <a16:creationId xmlns:a16="http://schemas.microsoft.com/office/drawing/2014/main" id="{8D0FA31E-8945-ECCA-70B9-C577D5C79DA3}"/>
+                <a16:creationId xmlns:a16="http://schemas.microsoft.com/office/drawing/2014/main" id="{93856F12-76C4-21F2-6DE7-DF5427E88D31}"/>
               </a:ext>
             </a:extLst>
           </p:cNvPr>
@@ -957,7 +957,7 @@
           <a:bodyPr/>
           <a:lstStyle/>
           <a:p>
-            <a:fld id="{A7588FB6-DE18-4472-9F68-5CB952117B86}" type="datetimeFigureOut">
+            <a:fld id="{67DAE527-8467-40DE-95AF-A610E0AB2909}" type="datetimeFigureOut">
               <a:rPr kumimoji="1" lang="ja-JP" altLang="en-US" smtClean="0"/>
               <a:t>2026/7/30</a:t>
             </a:fld>
@@ -970,7 +970,7 @@
           <p:cNvPr id="5" name="フッター プレースホルダー 4">
             <a:extLst>
               <a:ext uri="{FF2B5EF4-FFF2-40B4-BE49-F238E27FC236}">
-                <a16:creationId xmlns:a16="http://schemas.microsoft.com/office/drawing/2014/main" id="{7522F57C-1BAE-0229-FF17-BF8C20F9CF08}"/>
+                <a16:creationId xmlns:a16="http://schemas.microsoft.com/office/drawing/2014/main" id="{99A28531-748E-01A4-8E7B-4609F906545C}"/>
               </a:ext>
             </a:extLst>
           </p:cNvPr>
@@ -995,7 +995,7 @@
           <p:cNvPr id="6" name="スライド番号プレースホルダー 5">
             <a:extLst>
               <a:ext uri="{FF2B5EF4-FFF2-40B4-BE49-F238E27FC236}">
-                <a16:creationId xmlns:a16="http://schemas.microsoft.com/office/drawing/2014/main" id="{2D06EDC7-7101-916C-FF87-D8DB719DB2B4}"/>
+                <a16:creationId xmlns:a16="http://schemas.microsoft.com/office/drawing/2014/main" id="{38EC5F36-FDE5-26DD-2A37-1A9B48F3A85F}"/>
               </a:ext>
             </a:extLst>
           </p:cNvPr>
@@ -1011,7 +1011,7 @@
           <a:bodyPr/>
           <a:lstStyle/>
           <a:p>
-            <a:fld id="{5C949883-EB21-40F9-88A0-419BC2BC6F39}" type="slidenum">
+            <a:fld id="{C342AFD4-742E-43D6-9723-44C73474E714}" type="slidenum">
               <a:rPr kumimoji="1" lang="ja-JP" altLang="en-US" smtClean="0"/>
               <a:t>‹#›</a:t>
             </a:fld>
@@ -1022,7 +1022,7 @@
     </p:spTree>
     <p:extLst>
       <p:ext uri="{BB962C8B-B14F-4D97-AF65-F5344CB8AC3E}">
-        <p14:creationId xmlns:p14="http://schemas.microsoft.com/office/powerpoint/2010/main" val="4052274600"/>
+        <p14:creationId xmlns:p14="http://schemas.microsoft.com/office/powerpoint/2010/main" val="4149920149"/>
       </p:ext>
     </p:extLst>
   </p:cSld>
@@ -1054,7 +1054,7 @@
           <p:cNvPr id="2" name="タイトル 1">
             <a:extLst>
               <a:ext uri="{FF2B5EF4-FFF2-40B4-BE49-F238E27FC236}">
-                <a16:creationId xmlns:a16="http://schemas.microsoft.com/office/drawing/2014/main" id="{1FE7CA64-213F-7842-214E-5D96739B90FC}"/>
+                <a16:creationId xmlns:a16="http://schemas.microsoft.com/office/drawing/2014/main" id="{EAF2D62E-E24B-A2AF-C010-7CF2E3351F07}"/>
               </a:ext>
             </a:extLst>
           </p:cNvPr>
@@ -1091,7 +1091,7 @@
           <p:cNvPr id="3" name="テキスト プレースホルダー 2">
             <a:extLst>
               <a:ext uri="{FF2B5EF4-FFF2-40B4-BE49-F238E27FC236}">
-                <a16:creationId xmlns:a16="http://schemas.microsoft.com/office/drawing/2014/main" id="{4F933B17-3C01-1619-19D6-873FCAF552F9}"/>
+                <a16:creationId xmlns:a16="http://schemas.microsoft.com/office/drawing/2014/main" id="{E8CADFA4-FFEC-287F-4DE0-356496AC2074}"/>
               </a:ext>
             </a:extLst>
           </p:cNvPr>
@@ -1216,7 +1216,7 @@
           <p:cNvPr id="4" name="日付プレースホルダー 3">
             <a:extLst>
               <a:ext uri="{FF2B5EF4-FFF2-40B4-BE49-F238E27FC236}">
-                <a16:creationId xmlns:a16="http://schemas.microsoft.com/office/drawing/2014/main" id="{5C47B751-5632-D277-5094-8C5FD2719B4E}"/>
+                <a16:creationId xmlns:a16="http://schemas.microsoft.com/office/drawing/2014/main" id="{A0669B71-38D7-C4E1-77F4-4E3C551C564F}"/>
               </a:ext>
             </a:extLst>
           </p:cNvPr>
@@ -1232,7 +1232,7 @@
           <a:bodyPr/>
           <a:lstStyle/>
           <a:p>
-            <a:fld id="{A7588FB6-DE18-4472-9F68-5CB952117B86}" type="datetimeFigureOut">
+            <a:fld id="{67DAE527-8467-40DE-95AF-A610E0AB2909}" type="datetimeFigureOut">
               <a:rPr kumimoji="1" lang="ja-JP" altLang="en-US" smtClean="0"/>
               <a:t>2026/7/30</a:t>
             </a:fld>
@@ -1245,7 +1245,7 @@
           <p:cNvPr id="5" name="フッター プレースホルダー 4">
             <a:extLst>
               <a:ext uri="{FF2B5EF4-FFF2-40B4-BE49-F238E27FC236}">
-                <a16:creationId xmlns:a16="http://schemas.microsoft.com/office/drawing/2014/main" id="{E4CAF7E7-9922-ACA0-A271-0B57D60A925A}"/>
+                <a16:creationId xmlns:a16="http://schemas.microsoft.com/office/drawing/2014/main" id="{0539316F-E51A-378E-D8AF-9C7B344753FE}"/>
               </a:ext>
             </a:extLst>
           </p:cNvPr>
@@ -1270,7 +1270,7 @@
           <p:cNvPr id="6" name="スライド番号プレースホルダー 5">
             <a:extLst>
               <a:ext uri="{FF2B5EF4-FFF2-40B4-BE49-F238E27FC236}">
-                <a16:creationId xmlns:a16="http://schemas.microsoft.com/office/drawing/2014/main" id="{6EB52C52-F372-450E-780B-010A3670F253}"/>
+                <a16:creationId xmlns:a16="http://schemas.microsoft.com/office/drawing/2014/main" id="{F750CB69-4A9D-DCB7-C2F5-7C0D49CA7AF4}"/>
               </a:ext>
             </a:extLst>
           </p:cNvPr>
@@ -1286,7 +1286,7 @@
           <a:bodyPr/>
           <a:lstStyle/>
           <a:p>
-            <a:fld id="{5C949883-EB21-40F9-88A0-419BC2BC6F39}" type="slidenum">
+            <a:fld id="{C342AFD4-742E-43D6-9723-44C73474E714}" type="slidenum">
               <a:rPr kumimoji="1" lang="ja-JP" altLang="en-US" smtClean="0"/>
               <a:t>‹#›</a:t>
             </a:fld>
@@ -1297,7 +1297,7 @@
     </p:spTree>
     <p:extLst>
       <p:ext uri="{BB962C8B-B14F-4D97-AF65-F5344CB8AC3E}">
-        <p14:creationId xmlns:p14="http://schemas.microsoft.com/office/powerpoint/2010/main" val="3178140039"/>
+        <p14:creationId xmlns:p14="http://schemas.microsoft.com/office/powerpoint/2010/main" val="3373322832"/>
       </p:ext>
     </p:extLst>
   </p:cSld>
@@ -1329,7 +1329,7 @@
           <p:cNvPr id="2" name="タイトル 1">
             <a:extLst>
               <a:ext uri="{FF2B5EF4-FFF2-40B4-BE49-F238E27FC236}">
-                <a16:creationId xmlns:a16="http://schemas.microsoft.com/office/drawing/2014/main" id="{151CCCBB-9BCA-319D-9BBF-4AC2D6C3AF61}"/>
+                <a16:creationId xmlns:a16="http://schemas.microsoft.com/office/drawing/2014/main" id="{B84B0C36-F2B9-3CE4-0ABD-B6CC39BBCDDE}"/>
               </a:ext>
             </a:extLst>
           </p:cNvPr>
@@ -1357,7 +1357,7 @@
           <p:cNvPr id="3" name="コンテンツ プレースホルダー 2">
             <a:extLst>
               <a:ext uri="{FF2B5EF4-FFF2-40B4-BE49-F238E27FC236}">
-                <a16:creationId xmlns:a16="http://schemas.microsoft.com/office/drawing/2014/main" id="{729F7E0F-B7E0-4F24-9E3A-9690D8391CEE}"/>
+                <a16:creationId xmlns:a16="http://schemas.microsoft.com/office/drawing/2014/main" id="{DC9465E3-5A48-9D33-2A5F-F5DAD975E191}"/>
               </a:ext>
             </a:extLst>
           </p:cNvPr>
@@ -1451,7 +1451,7 @@
           <p:cNvPr id="4" name="コンテンツ プレースホルダー 3">
             <a:extLst>
               <a:ext uri="{FF2B5EF4-FFF2-40B4-BE49-F238E27FC236}">
-                <a16:creationId xmlns:a16="http://schemas.microsoft.com/office/drawing/2014/main" id="{0C2E4E5F-D7C1-89F1-1EFE-C4E57356C40F}"/>
+                <a16:creationId xmlns:a16="http://schemas.microsoft.com/office/drawing/2014/main" id="{BAFC1601-AA5A-5D22-BA9B-234284D1D3B1}"/>
               </a:ext>
             </a:extLst>
           </p:cNvPr>
@@ -1545,7 +1545,7 @@
           <p:cNvPr id="5" name="日付プレースホルダー 4">
             <a:extLst>
               <a:ext uri="{FF2B5EF4-FFF2-40B4-BE49-F238E27FC236}">
-                <a16:creationId xmlns:a16="http://schemas.microsoft.com/office/drawing/2014/main" id="{95C10935-93D8-2975-B15A-BB2AC4DD77ED}"/>
+                <a16:creationId xmlns:a16="http://schemas.microsoft.com/office/drawing/2014/main" id="{8F454ED8-5B11-BF7C-744C-6BEB3BB66FEC}"/>
               </a:ext>
             </a:extLst>
           </p:cNvPr>
@@ -1561,7 +1561,7 @@
           <a:bodyPr/>
           <a:lstStyle/>
           <a:p>
-            <a:fld id="{A7588FB6-DE18-4472-9F68-5CB952117B86}" type="datetimeFigureOut">
+            <a:fld id="{67DAE527-8467-40DE-95AF-A610E0AB2909}" type="datetimeFigureOut">
               <a:rPr kumimoji="1" lang="ja-JP" altLang="en-US" smtClean="0"/>
               <a:t>2026/7/30</a:t>
             </a:fld>
@@ -1574,7 +1574,7 @@
           <p:cNvPr id="6" name="フッター プレースホルダー 5">
             <a:extLst>
               <a:ext uri="{FF2B5EF4-FFF2-40B4-BE49-F238E27FC236}">
-                <a16:creationId xmlns:a16="http://schemas.microsoft.com/office/drawing/2014/main" id="{4693D275-741F-7005-C437-D9CE986F376E}"/>
+                <a16:creationId xmlns:a16="http://schemas.microsoft.com/office/drawing/2014/main" id="{E4BC7D66-4B52-1682-0478-29B1A603CB7D}"/>
               </a:ext>
             </a:extLst>
           </p:cNvPr>
@@ -1599,7 +1599,7 @@
           <p:cNvPr id="7" name="スライド番号プレースホルダー 6">
             <a:extLst>
               <a:ext uri="{FF2B5EF4-FFF2-40B4-BE49-F238E27FC236}">
-                <a16:creationId xmlns:a16="http://schemas.microsoft.com/office/drawing/2014/main" id="{8B7E84D8-BFBA-5AE8-1287-B162E7DDEB29}"/>
+                <a16:creationId xmlns:a16="http://schemas.microsoft.com/office/drawing/2014/main" id="{BC3E3CB7-0B10-FD5D-C086-46373D665F89}"/>
               </a:ext>
             </a:extLst>
           </p:cNvPr>
@@ -1615,7 +1615,7 @@
           <a:bodyPr/>
           <a:lstStyle/>
           <a:p>
-            <a:fld id="{5C949883-EB21-40F9-88A0-419BC2BC6F39}" type="slidenum">
+            <a:fld id="{C342AFD4-742E-43D6-9723-44C73474E714}" type="slidenum">
               <a:rPr kumimoji="1" lang="ja-JP" altLang="en-US" smtClean="0"/>
               <a:t>‹#›</a:t>
             </a:fld>
@@ -1626,7 +1626,7 @@
     </p:spTree>
     <p:extLst>
       <p:ext uri="{BB962C8B-B14F-4D97-AF65-F5344CB8AC3E}">
-        <p14:creationId xmlns:p14="http://schemas.microsoft.com/office/powerpoint/2010/main" val="1416648962"/>
+        <p14:creationId xmlns:p14="http://schemas.microsoft.com/office/powerpoint/2010/main" val="1942417318"/>
       </p:ext>
     </p:extLst>
   </p:cSld>
@@ -1658,7 +1658,7 @@
           <p:cNvPr id="2" name="タイトル 1">
             <a:extLst>
               <a:ext uri="{FF2B5EF4-FFF2-40B4-BE49-F238E27FC236}">
-                <a16:creationId xmlns:a16="http://schemas.microsoft.com/office/drawing/2014/main" id="{4E9889EF-795F-9628-64BB-6EB3106EC67F}"/>
+                <a16:creationId xmlns:a16="http://schemas.microsoft.com/office/drawing/2014/main" id="{29FC2813-1FCA-7E96-C664-8FDF6CB50AE4}"/>
               </a:ext>
             </a:extLst>
           </p:cNvPr>
@@ -1691,7 +1691,7 @@
           <p:cNvPr id="3" name="テキスト プレースホルダー 2">
             <a:extLst>
               <a:ext uri="{FF2B5EF4-FFF2-40B4-BE49-F238E27FC236}">
-                <a16:creationId xmlns:a16="http://schemas.microsoft.com/office/drawing/2014/main" id="{2DF14AED-9B48-B057-DF02-E6729C71FFB0}"/>
+                <a16:creationId xmlns:a16="http://schemas.microsoft.com/office/drawing/2014/main" id="{EFB9F9B3-2AE8-7E09-4805-45F5989DC48E}"/>
               </a:ext>
             </a:extLst>
           </p:cNvPr>
@@ -1762,7 +1762,7 @@
           <p:cNvPr id="4" name="コンテンツ プレースホルダー 3">
             <a:extLst>
               <a:ext uri="{FF2B5EF4-FFF2-40B4-BE49-F238E27FC236}">
-                <a16:creationId xmlns:a16="http://schemas.microsoft.com/office/drawing/2014/main" id="{BC0F9EC1-001A-3298-E900-CF93866BF4EA}"/>
+                <a16:creationId xmlns:a16="http://schemas.microsoft.com/office/drawing/2014/main" id="{48262D35-6808-FCE7-074B-40DFC111AD5F}"/>
               </a:ext>
             </a:extLst>
           </p:cNvPr>
@@ -1856,7 +1856,7 @@
           <p:cNvPr id="5" name="テキスト プレースホルダー 4">
             <a:extLst>
               <a:ext uri="{FF2B5EF4-FFF2-40B4-BE49-F238E27FC236}">
-                <a16:creationId xmlns:a16="http://schemas.microsoft.com/office/drawing/2014/main" id="{252BE7B5-5AE0-A735-6E87-EC0FB7619CDF}"/>
+                <a16:creationId xmlns:a16="http://schemas.microsoft.com/office/drawing/2014/main" id="{6A0CFC87-A1F0-D195-3994-5C54E5B2E79C}"/>
               </a:ext>
             </a:extLst>
           </p:cNvPr>
@@ -1927,7 +1927,7 @@
           <p:cNvPr id="6" name="コンテンツ プレースホルダー 5">
             <a:extLst>
               <a:ext uri="{FF2B5EF4-FFF2-40B4-BE49-F238E27FC236}">
-                <a16:creationId xmlns:a16="http://schemas.microsoft.com/office/drawing/2014/main" id="{2142CED8-1EA9-90F2-886A-CE116E04C988}"/>
+                <a16:creationId xmlns:a16="http://schemas.microsoft.com/office/drawing/2014/main" id="{5FCC687B-8180-A1F7-AF59-06A57E643FF5}"/>
               </a:ext>
             </a:extLst>
           </p:cNvPr>
@@ -2021,7 +2021,7 @@
           <p:cNvPr id="7" name="日付プレースホルダー 6">
             <a:extLst>
               <a:ext uri="{FF2B5EF4-FFF2-40B4-BE49-F238E27FC236}">
-                <a16:creationId xmlns:a16="http://schemas.microsoft.com/office/drawing/2014/main" id="{0EDD1A1D-4D1D-8BB7-5E31-1671E77F2796}"/>
+                <a16:creationId xmlns:a16="http://schemas.microsoft.com/office/drawing/2014/main" id="{77422978-1616-3DDA-F250-49AB076351F1}"/>
               </a:ext>
             </a:extLst>
           </p:cNvPr>
@@ -2037,7 +2037,7 @@
           <a:bodyPr/>
           <a:lstStyle/>
           <a:p>
-            <a:fld id="{A7588FB6-DE18-4472-9F68-5CB952117B86}" type="datetimeFigureOut">
+            <a:fld id="{67DAE527-8467-40DE-95AF-A610E0AB2909}" type="datetimeFigureOut">
               <a:rPr kumimoji="1" lang="ja-JP" altLang="en-US" smtClean="0"/>
               <a:t>2026/7/30</a:t>
             </a:fld>
@@ -2050,7 +2050,7 @@
           <p:cNvPr id="8" name="フッター プレースホルダー 7">
             <a:extLst>
               <a:ext uri="{FF2B5EF4-FFF2-40B4-BE49-F238E27FC236}">
-                <a16:creationId xmlns:a16="http://schemas.microsoft.com/office/drawing/2014/main" id="{44AF992F-9BB0-620D-3388-2BAC10820200}"/>
+                <a16:creationId xmlns:a16="http://schemas.microsoft.com/office/drawing/2014/main" id="{13231ED6-B767-F2BC-5825-FFA1119BA2DA}"/>
               </a:ext>
             </a:extLst>
           </p:cNvPr>
@@ -2075,7 +2075,7 @@
           <p:cNvPr id="9" name="スライド番号プレースホルダー 8">
             <a:extLst>
               <a:ext uri="{FF2B5EF4-FFF2-40B4-BE49-F238E27FC236}">
-                <a16:creationId xmlns:a16="http://schemas.microsoft.com/office/drawing/2014/main" id="{EEF502F8-1D61-466D-FBD7-103D65CD7802}"/>
+                <a16:creationId xmlns:a16="http://schemas.microsoft.com/office/drawing/2014/main" id="{AA51EC22-BEA2-8A20-8542-6A3A2F902D03}"/>
               </a:ext>
             </a:extLst>
           </p:cNvPr>
@@ -2091,7 +2091,7 @@
           <a:bodyPr/>
           <a:lstStyle/>
           <a:p>
-            <a:fld id="{5C949883-EB21-40F9-88A0-419BC2BC6F39}" type="slidenum">
+            <a:fld id="{C342AFD4-742E-43D6-9723-44C73474E714}" type="slidenum">
               <a:rPr kumimoji="1" lang="ja-JP" altLang="en-US" smtClean="0"/>
               <a:t>‹#›</a:t>
             </a:fld>
@@ -2102,7 +2102,7 @@
     </p:spTree>
     <p:extLst>
       <p:ext uri="{BB962C8B-B14F-4D97-AF65-F5344CB8AC3E}">
-        <p14:creationId xmlns:p14="http://schemas.microsoft.com/office/powerpoint/2010/main" val="67359909"/>
+        <p14:creationId xmlns:p14="http://schemas.microsoft.com/office/powerpoint/2010/main" val="3061793118"/>
       </p:ext>
     </p:extLst>
   </p:cSld>
@@ -2134,7 +2134,7 @@
           <p:cNvPr id="2" name="タイトル 1">
             <a:extLst>
               <a:ext uri="{FF2B5EF4-FFF2-40B4-BE49-F238E27FC236}">
-                <a16:creationId xmlns:a16="http://schemas.microsoft.com/office/drawing/2014/main" id="{B0862928-77D0-475F-ED8D-07C2B77C812B}"/>
+                <a16:creationId xmlns:a16="http://schemas.microsoft.com/office/drawing/2014/main" id="{536B9A73-9A30-B89E-FBF9-831821EEED71}"/>
               </a:ext>
             </a:extLst>
           </p:cNvPr>
@@ -2162,7 +2162,7 @@
           <p:cNvPr id="3" name="日付プレースホルダー 2">
             <a:extLst>
               <a:ext uri="{FF2B5EF4-FFF2-40B4-BE49-F238E27FC236}">
-                <a16:creationId xmlns:a16="http://schemas.microsoft.com/office/drawing/2014/main" id="{14C0B9A7-3672-428B-4BDC-CC844ECA4FB0}"/>
+                <a16:creationId xmlns:a16="http://schemas.microsoft.com/office/drawing/2014/main" id="{A97D9486-CB71-9906-D683-6B68D24330EF}"/>
               </a:ext>
             </a:extLst>
           </p:cNvPr>
@@ -2178,7 +2178,7 @@
           <a:bodyPr/>
           <a:lstStyle/>
           <a:p>
-            <a:fld id="{A7588FB6-DE18-4472-9F68-5CB952117B86}" type="datetimeFigureOut">
+            <a:fld id="{67DAE527-8467-40DE-95AF-A610E0AB2909}" type="datetimeFigureOut">
               <a:rPr kumimoji="1" lang="ja-JP" altLang="en-US" smtClean="0"/>
               <a:t>2026/7/30</a:t>
             </a:fld>
@@ -2191,7 +2191,7 @@
           <p:cNvPr id="4" name="フッター プレースホルダー 3">
             <a:extLst>
               <a:ext uri="{FF2B5EF4-FFF2-40B4-BE49-F238E27FC236}">
-                <a16:creationId xmlns:a16="http://schemas.microsoft.com/office/drawing/2014/main" id="{7D470F29-0BD9-528A-5C18-0D552D74C710}"/>
+                <a16:creationId xmlns:a16="http://schemas.microsoft.com/office/drawing/2014/main" id="{D4C5B60C-AE76-D523-D084-9792599304F4}"/>
               </a:ext>
             </a:extLst>
           </p:cNvPr>
@@ -2216,7 +2216,7 @@
           <p:cNvPr id="5" name="スライド番号プレースホルダー 4">
             <a:extLst>
               <a:ext uri="{FF2B5EF4-FFF2-40B4-BE49-F238E27FC236}">
-                <a16:creationId xmlns:a16="http://schemas.microsoft.com/office/drawing/2014/main" id="{A4A86101-5E43-D523-0791-EE16CA5818B6}"/>
+                <a16:creationId xmlns:a16="http://schemas.microsoft.com/office/drawing/2014/main" id="{2C4FE5E8-A3CC-594E-75C5-5104B3F038EC}"/>
               </a:ext>
             </a:extLst>
           </p:cNvPr>
@@ -2232,7 +2232,7 @@
           <a:bodyPr/>
           <a:lstStyle/>
           <a:p>
-            <a:fld id="{5C949883-EB21-40F9-88A0-419BC2BC6F39}" type="slidenum">
+            <a:fld id="{C342AFD4-742E-43D6-9723-44C73474E714}" type="slidenum">
               <a:rPr kumimoji="1" lang="ja-JP" altLang="en-US" smtClean="0"/>
               <a:t>‹#›</a:t>
             </a:fld>
@@ -2243,7 +2243,7 @@
     </p:spTree>
     <p:extLst>
       <p:ext uri="{BB962C8B-B14F-4D97-AF65-F5344CB8AC3E}">
-        <p14:creationId xmlns:p14="http://schemas.microsoft.com/office/powerpoint/2010/main" val="897358526"/>
+        <p14:creationId xmlns:p14="http://schemas.microsoft.com/office/powerpoint/2010/main" val="2293497214"/>
       </p:ext>
     </p:extLst>
   </p:cSld>
@@ -2275,7 +2275,7 @@
           <p:cNvPr id="2" name="日付プレースホルダー 1">
             <a:extLst>
               <a:ext uri="{FF2B5EF4-FFF2-40B4-BE49-F238E27FC236}">
-                <a16:creationId xmlns:a16="http://schemas.microsoft.com/office/drawing/2014/main" id="{4DBED1F7-E523-F43C-2D42-44F45FA8FB42}"/>
+                <a16:creationId xmlns:a16="http://schemas.microsoft.com/office/drawing/2014/main" id="{BC460B2A-2CB5-AE9C-BE77-0B29BAAC2BC1}"/>
               </a:ext>
             </a:extLst>
           </p:cNvPr>
@@ -2291,7 +2291,7 @@
           <a:bodyPr/>
           <a:lstStyle/>
           <a:p>
-            <a:fld id="{A7588FB6-DE18-4472-9F68-5CB952117B86}" type="datetimeFigureOut">
+            <a:fld id="{67DAE527-8467-40DE-95AF-A610E0AB2909}" type="datetimeFigureOut">
               <a:rPr kumimoji="1" lang="ja-JP" altLang="en-US" smtClean="0"/>
               <a:t>2026/7/30</a:t>
             </a:fld>
@@ -2304,7 +2304,7 @@
           <p:cNvPr id="3" name="フッター プレースホルダー 2">
             <a:extLst>
               <a:ext uri="{FF2B5EF4-FFF2-40B4-BE49-F238E27FC236}">
-                <a16:creationId xmlns:a16="http://schemas.microsoft.com/office/drawing/2014/main" id="{9C68DA7A-51DB-ABE4-1D84-E3339016E162}"/>
+                <a16:creationId xmlns:a16="http://schemas.microsoft.com/office/drawing/2014/main" id="{F3207DC8-DE8E-BD50-8E29-1558B9264307}"/>
               </a:ext>
             </a:extLst>
           </p:cNvPr>
@@ -2329,7 +2329,7 @@
           <p:cNvPr id="4" name="スライド番号プレースホルダー 3">
             <a:extLst>
               <a:ext uri="{FF2B5EF4-FFF2-40B4-BE49-F238E27FC236}">
-                <a16:creationId xmlns:a16="http://schemas.microsoft.com/office/drawing/2014/main" id="{BA9BBF13-D51A-1D17-6B7E-00FB87C546B5}"/>
+                <a16:creationId xmlns:a16="http://schemas.microsoft.com/office/drawing/2014/main" id="{FA366562-3B44-5FC3-4A10-17E4A8526E1B}"/>
               </a:ext>
             </a:extLst>
           </p:cNvPr>
@@ -2345,7 +2345,7 @@
           <a:bodyPr/>
           <a:lstStyle/>
           <a:p>
-            <a:fld id="{5C949883-EB21-40F9-88A0-419BC2BC6F39}" type="slidenum">
+            <a:fld id="{C342AFD4-742E-43D6-9723-44C73474E714}" type="slidenum">
               <a:rPr kumimoji="1" lang="ja-JP" altLang="en-US" smtClean="0"/>
               <a:t>‹#›</a:t>
             </a:fld>
@@ -2356,7 +2356,7 @@
     </p:spTree>
     <p:extLst>
       <p:ext uri="{BB962C8B-B14F-4D97-AF65-F5344CB8AC3E}">
-        <p14:creationId xmlns:p14="http://schemas.microsoft.com/office/powerpoint/2010/main" val="2453011991"/>
+        <p14:creationId xmlns:p14="http://schemas.microsoft.com/office/powerpoint/2010/main" val="978255066"/>
       </p:ext>
     </p:extLst>
   </p:cSld>
@@ -2388,7 +2388,7 @@
           <p:cNvPr id="2" name="タイトル 1">
             <a:extLst>
               <a:ext uri="{FF2B5EF4-FFF2-40B4-BE49-F238E27FC236}">
-                <a16:creationId xmlns:a16="http://schemas.microsoft.com/office/drawing/2014/main" id="{F6214E34-6B42-B9C1-8752-D7859B4C23D4}"/>
+                <a16:creationId xmlns:a16="http://schemas.microsoft.com/office/drawing/2014/main" id="{C351263F-F6A3-531D-82C6-81D78E6D0904}"/>
               </a:ext>
             </a:extLst>
           </p:cNvPr>
@@ -2425,7 +2425,7 @@
           <p:cNvPr id="3" name="コンテンツ プレースホルダー 2">
             <a:extLst>
               <a:ext uri="{FF2B5EF4-FFF2-40B4-BE49-F238E27FC236}">
-                <a16:creationId xmlns:a16="http://schemas.microsoft.com/office/drawing/2014/main" id="{F6320E4D-5282-0849-C04F-81C5ADC8A63B}"/>
+                <a16:creationId xmlns:a16="http://schemas.microsoft.com/office/drawing/2014/main" id="{01748487-35C5-92AB-159E-89CE158A850A}"/>
               </a:ext>
             </a:extLst>
           </p:cNvPr>
@@ -2547,7 +2547,7 @@
           <p:cNvPr id="4" name="テキスト プレースホルダー 3">
             <a:extLst>
               <a:ext uri="{FF2B5EF4-FFF2-40B4-BE49-F238E27FC236}">
-                <a16:creationId xmlns:a16="http://schemas.microsoft.com/office/drawing/2014/main" id="{BCC16EAD-D45F-5BD5-414A-8FAC5D0F5122}"/>
+                <a16:creationId xmlns:a16="http://schemas.microsoft.com/office/drawing/2014/main" id="{9A230C79-3167-0BD7-A313-74E56FB3A8B4}"/>
               </a:ext>
             </a:extLst>
           </p:cNvPr>
@@ -2618,7 +2618,7 @@
           <p:cNvPr id="5" name="日付プレースホルダー 4">
             <a:extLst>
               <a:ext uri="{FF2B5EF4-FFF2-40B4-BE49-F238E27FC236}">
-                <a16:creationId xmlns:a16="http://schemas.microsoft.com/office/drawing/2014/main" id="{854480BE-FFD5-7BC7-705A-1C1E729CCD2A}"/>
+                <a16:creationId xmlns:a16="http://schemas.microsoft.com/office/drawing/2014/main" id="{5A68B840-4EBD-731C-D3F8-C6D5512B7C44}"/>
               </a:ext>
             </a:extLst>
           </p:cNvPr>
@@ -2634,7 +2634,7 @@
           <a:bodyPr/>
           <a:lstStyle/>
           <a:p>
-            <a:fld id="{A7588FB6-DE18-4472-9F68-5CB952117B86}" type="datetimeFigureOut">
+            <a:fld id="{67DAE527-8467-40DE-95AF-A610E0AB2909}" type="datetimeFigureOut">
               <a:rPr kumimoji="1" lang="ja-JP" altLang="en-US" smtClean="0"/>
               <a:t>2026/7/30</a:t>
             </a:fld>
@@ -2647,7 +2647,7 @@
           <p:cNvPr id="6" name="フッター プレースホルダー 5">
             <a:extLst>
               <a:ext uri="{FF2B5EF4-FFF2-40B4-BE49-F238E27FC236}">
-                <a16:creationId xmlns:a16="http://schemas.microsoft.com/office/drawing/2014/main" id="{3EA59771-70F0-BCEA-51E9-D57F343CEF85}"/>
+                <a16:creationId xmlns:a16="http://schemas.microsoft.com/office/drawing/2014/main" id="{1FF34941-ACCB-9D07-6B73-31EC59FFD946}"/>
               </a:ext>
             </a:extLst>
           </p:cNvPr>
@@ -2672,7 +2672,7 @@
           <p:cNvPr id="7" name="スライド番号プレースホルダー 6">
             <a:extLst>
               <a:ext uri="{FF2B5EF4-FFF2-40B4-BE49-F238E27FC236}">
-                <a16:creationId xmlns:a16="http://schemas.microsoft.com/office/drawing/2014/main" id="{A9FDA4C7-3DCB-8A37-2CCA-8F49F79A3273}"/>
+                <a16:creationId xmlns:a16="http://schemas.microsoft.com/office/drawing/2014/main" id="{E5A84CCE-18A0-DA0B-C691-ECA30B1AB908}"/>
               </a:ext>
             </a:extLst>
           </p:cNvPr>
@@ -2688,7 +2688,7 @@
           <a:bodyPr/>
           <a:lstStyle/>
           <a:p>
-            <a:fld id="{5C949883-EB21-40F9-88A0-419BC2BC6F39}" type="slidenum">
+            <a:fld id="{C342AFD4-742E-43D6-9723-44C73474E714}" type="slidenum">
               <a:rPr kumimoji="1" lang="ja-JP" altLang="en-US" smtClean="0"/>
               <a:t>‹#›</a:t>
             </a:fld>
@@ -2699,7 +2699,7 @@
     </p:spTree>
     <p:extLst>
       <p:ext uri="{BB962C8B-B14F-4D97-AF65-F5344CB8AC3E}">
-        <p14:creationId xmlns:p14="http://schemas.microsoft.com/office/powerpoint/2010/main" val="3103953266"/>
+        <p14:creationId xmlns:p14="http://schemas.microsoft.com/office/powerpoint/2010/main" val="2191361662"/>
       </p:ext>
     </p:extLst>
   </p:cSld>
@@ -2731,7 +2731,7 @@
           <p:cNvPr id="2" name="タイトル 1">
             <a:extLst>
               <a:ext uri="{FF2B5EF4-FFF2-40B4-BE49-F238E27FC236}">
-                <a16:creationId xmlns:a16="http://schemas.microsoft.com/office/drawing/2014/main" id="{162409A3-3836-F654-C3ED-9DBE02D6833F}"/>
+                <a16:creationId xmlns:a16="http://schemas.microsoft.com/office/drawing/2014/main" id="{05F47A94-E578-816B-6E1D-6CAE51C28A92}"/>
               </a:ext>
             </a:extLst>
           </p:cNvPr>
@@ -2768,7 +2768,7 @@
           <p:cNvPr id="3" name="図プレースホルダー 2">
             <a:extLst>
               <a:ext uri="{FF2B5EF4-FFF2-40B4-BE49-F238E27FC236}">
-                <a16:creationId xmlns:a16="http://schemas.microsoft.com/office/drawing/2014/main" id="{D51742FE-4986-F341-500C-B24926944736}"/>
+                <a16:creationId xmlns:a16="http://schemas.microsoft.com/office/drawing/2014/main" id="{086A7822-BBC5-98AC-5F44-481014372D02}"/>
               </a:ext>
             </a:extLst>
           </p:cNvPr>
@@ -2835,7 +2835,7 @@
           <p:cNvPr id="4" name="テキスト プレースホルダー 3">
             <a:extLst>
               <a:ext uri="{FF2B5EF4-FFF2-40B4-BE49-F238E27FC236}">
-                <a16:creationId xmlns:a16="http://schemas.microsoft.com/office/drawing/2014/main" id="{A66E19F1-7D61-0768-9B27-99094E7906F7}"/>
+                <a16:creationId xmlns:a16="http://schemas.microsoft.com/office/drawing/2014/main" id="{59005D72-6481-0907-512A-12D5E7F36FEF}"/>
               </a:ext>
             </a:extLst>
           </p:cNvPr>
@@ -2906,7 +2906,7 @@
           <p:cNvPr id="5" name="日付プレースホルダー 4">
             <a:extLst>
               <a:ext uri="{FF2B5EF4-FFF2-40B4-BE49-F238E27FC236}">
-                <a16:creationId xmlns:a16="http://schemas.microsoft.com/office/drawing/2014/main" id="{788227EC-2F68-5914-C6C9-72BAFEB4D221}"/>
+                <a16:creationId xmlns:a16="http://schemas.microsoft.com/office/drawing/2014/main" id="{3B4B20F5-8EE7-16D7-BA45-0F3022662BF7}"/>
               </a:ext>
             </a:extLst>
           </p:cNvPr>
@@ -2922,7 +2922,7 @@
           <a:bodyPr/>
           <a:lstStyle/>
           <a:p>
-            <a:fld id="{A7588FB6-DE18-4472-9F68-5CB952117B86}" type="datetimeFigureOut">
+            <a:fld id="{67DAE527-8467-40DE-95AF-A610E0AB2909}" type="datetimeFigureOut">
               <a:rPr kumimoji="1" lang="ja-JP" altLang="en-US" smtClean="0"/>
               <a:t>2026/7/30</a:t>
             </a:fld>
@@ -2935,7 +2935,7 @@
           <p:cNvPr id="6" name="フッター プレースホルダー 5">
             <a:extLst>
               <a:ext uri="{FF2B5EF4-FFF2-40B4-BE49-F238E27FC236}">
-                <a16:creationId xmlns:a16="http://schemas.microsoft.com/office/drawing/2014/main" id="{39AE851A-0B7E-5943-C3B1-C52293BB7654}"/>
+                <a16:creationId xmlns:a16="http://schemas.microsoft.com/office/drawing/2014/main" id="{82121DDD-6E6A-278A-69DD-51E6CBD47E9A}"/>
               </a:ext>
             </a:extLst>
           </p:cNvPr>
@@ -2960,7 +2960,7 @@
           <p:cNvPr id="7" name="スライド番号プレースホルダー 6">
             <a:extLst>
               <a:ext uri="{FF2B5EF4-FFF2-40B4-BE49-F238E27FC236}">
-                <a16:creationId xmlns:a16="http://schemas.microsoft.com/office/drawing/2014/main" id="{24665658-7B22-668C-C160-D7994BE3D6BE}"/>
+                <a16:creationId xmlns:a16="http://schemas.microsoft.com/office/drawing/2014/main" id="{24009869-9C55-9C60-2E40-76BFA83EF6F0}"/>
               </a:ext>
             </a:extLst>
           </p:cNvPr>
@@ -2976,7 +2976,7 @@
           <a:bodyPr/>
           <a:lstStyle/>
           <a:p>
-            <a:fld id="{5C949883-EB21-40F9-88A0-419BC2BC6F39}" type="slidenum">
+            <a:fld id="{C342AFD4-742E-43D6-9723-44C73474E714}" type="slidenum">
               <a:rPr kumimoji="1" lang="ja-JP" altLang="en-US" smtClean="0"/>
               <a:t>‹#›</a:t>
             </a:fld>
@@ -2987,7 +2987,7 @@
     </p:spTree>
     <p:extLst>
       <p:ext uri="{BB962C8B-B14F-4D97-AF65-F5344CB8AC3E}">
-        <p14:creationId xmlns:p14="http://schemas.microsoft.com/office/powerpoint/2010/main" val="377522650"/>
+        <p14:creationId xmlns:p14="http://schemas.microsoft.com/office/powerpoint/2010/main" val="1594196944"/>
       </p:ext>
     </p:extLst>
   </p:cSld>
@@ -3024,7 +3024,7 @@
           <p:cNvPr id="2" name="タイトル プレースホルダー 1">
             <a:extLst>
               <a:ext uri="{FF2B5EF4-FFF2-40B4-BE49-F238E27FC236}">
-                <a16:creationId xmlns:a16="http://schemas.microsoft.com/office/drawing/2014/main" id="{FA5F30C7-33D1-C09A-8239-004E4AF29D0C}"/>
+                <a16:creationId xmlns:a16="http://schemas.microsoft.com/office/drawing/2014/main" id="{17E4D5CA-4910-5334-1EAA-8FCC01EAB4C8}"/>
               </a:ext>
             </a:extLst>
           </p:cNvPr>
@@ -3062,7 +3062,7 @@
           <p:cNvPr id="3" name="テキスト プレースホルダー 2">
             <a:extLst>
               <a:ext uri="{FF2B5EF4-FFF2-40B4-BE49-F238E27FC236}">
-                <a16:creationId xmlns:a16="http://schemas.microsoft.com/office/drawing/2014/main" id="{36B8D478-F103-7C55-F9D7-57EAAB234428}"/>
+                <a16:creationId xmlns:a16="http://schemas.microsoft.com/office/drawing/2014/main" id="{83E393DE-E000-14F3-F433-2133A3480E72}"/>
               </a:ext>
             </a:extLst>
           </p:cNvPr>
@@ -3161,7 +3161,7 @@
           <p:cNvPr id="4" name="日付プレースホルダー 3">
             <a:extLst>
               <a:ext uri="{FF2B5EF4-FFF2-40B4-BE49-F238E27FC236}">
-                <a16:creationId xmlns:a16="http://schemas.microsoft.com/office/drawing/2014/main" id="{9C2F614B-F258-78D8-ACBE-773762A0CF23}"/>
+                <a16:creationId xmlns:a16="http://schemas.microsoft.com/office/drawing/2014/main" id="{0B7CA4AB-3958-E3B5-BE47-B3DA4FDF4B99}"/>
               </a:ext>
             </a:extLst>
           </p:cNvPr>
@@ -3195,7 +3195,7 @@
             </a:lvl1pPr>
           </a:lstStyle>
           <a:p>
-            <a:fld id="{A7588FB6-DE18-4472-9F68-5CB952117B86}" type="datetimeFigureOut">
+            <a:fld id="{67DAE527-8467-40DE-95AF-A610E0AB2909}" type="datetimeFigureOut">
               <a:rPr kumimoji="1" lang="ja-JP" altLang="en-US" smtClean="0"/>
               <a:t>2026/7/30</a:t>
             </a:fld>
@@ -3208,7 +3208,7 @@
           <p:cNvPr id="5" name="フッター プレースホルダー 4">
             <a:extLst>
               <a:ext uri="{FF2B5EF4-FFF2-40B4-BE49-F238E27FC236}">
-                <a16:creationId xmlns:a16="http://schemas.microsoft.com/office/drawing/2014/main" id="{94357377-89D0-9745-B4C1-117C7CC0704E}"/>
+                <a16:creationId xmlns:a16="http://schemas.microsoft.com/office/drawing/2014/main" id="{65F39EA3-4308-1BB4-BA02-F998748755B9}"/>
               </a:ext>
             </a:extLst>
           </p:cNvPr>
@@ -3251,7 +3251,7 @@
           <p:cNvPr id="6" name="スライド番号プレースホルダー 5">
             <a:extLst>
               <a:ext uri="{FF2B5EF4-FFF2-40B4-BE49-F238E27FC236}">
-                <a16:creationId xmlns:a16="http://schemas.microsoft.com/office/drawing/2014/main" id="{ECA40CAD-911D-A421-A9A6-7A92E63FB69B}"/>
+                <a16:creationId xmlns:a16="http://schemas.microsoft.com/office/drawing/2014/main" id="{CBFE8998-D001-4C6E-09D1-7FA6938AB30A}"/>
               </a:ext>
             </a:extLst>
           </p:cNvPr>
@@ -3285,7 +3285,7 @@
             </a:lvl1pPr>
           </a:lstStyle>
           <a:p>
-            <a:fld id="{5C949883-EB21-40F9-88A0-419BC2BC6F39}" type="slidenum">
+            <a:fld id="{C342AFD4-742E-43D6-9723-44C73474E714}" type="slidenum">
               <a:rPr kumimoji="1" lang="ja-JP" altLang="en-US" smtClean="0"/>
               <a:t>‹#›</a:t>
             </a:fld>
@@ -3296,7 +3296,7 @@
     </p:spTree>
     <p:extLst>
       <p:ext uri="{BB962C8B-B14F-4D97-AF65-F5344CB8AC3E}">
-        <p14:creationId xmlns:p14="http://schemas.microsoft.com/office/powerpoint/2010/main" val="2850255111"/>
+        <p14:creationId xmlns:p14="http://schemas.microsoft.com/office/powerpoint/2010/main" val="1910505652"/>
       </p:ext>
     </p:extLst>
   </p:cSld>
@@ -3619,7 +3619,7 @@
           <p:cNvPr id="2" name="テキスト ボックス 1">
             <a:extLst>
               <a:ext uri="{FF2B5EF4-FFF2-40B4-BE49-F238E27FC236}">
-                <a16:creationId xmlns:a16="http://schemas.microsoft.com/office/drawing/2014/main" id="{30B56192-33E4-C5BF-5D3E-9246082111D5}"/>
+                <a16:creationId xmlns:a16="http://schemas.microsoft.com/office/drawing/2014/main" id="{B33562C9-F76A-96B2-4B05-221B35CFB2D4}"/>
               </a:ext>
             </a:extLst>
           </p:cNvPr>
@@ -3665,7 +3665,7 @@
           <p:cNvPr id="3" name="テキスト ボックス 2">
             <a:extLst>
               <a:ext uri="{FF2B5EF4-FFF2-40B4-BE49-F238E27FC236}">
-                <a16:creationId xmlns:a16="http://schemas.microsoft.com/office/drawing/2014/main" id="{FC4A1499-3C29-B89B-9390-28D4892D094A}"/>
+                <a16:creationId xmlns:a16="http://schemas.microsoft.com/office/drawing/2014/main" id="{05C6A507-79E4-61BC-A0F5-D60E37114134}"/>
               </a:ext>
             </a:extLst>
           </p:cNvPr>
@@ -3695,14 +3695,17 @@
                 </a:solidFill>
                 <a:latin typeface="Arial" panose="020B0604020202020204" pitchFamily="34" charset="0"/>
               </a:rPr>
-              <a:t>cosme-stock-alert TECH EXPLANATION</a:t>
-            </a:r>
-            <a:endParaRPr kumimoji="1" lang="ja-JP" altLang="en-US" sz="3400" b="1">
-              <a:solidFill>
-                <a:srgbClr val="111111"/>
-              </a:solidFill>
-              <a:latin typeface="Arial" panose="020B0604020202020204" pitchFamily="34" charset="0"/>
-            </a:endParaRPr>
+              <a:t>Cosme Stock Alert</a:t>
+            </a:r>
+            <a:r>
+              <a:rPr kumimoji="1" lang="ja-JP" altLang="en-US" sz="3400" b="1">
+                <a:solidFill>
+                  <a:srgbClr val="111111"/>
+                </a:solidFill>
+                <a:latin typeface="Arial" panose="020B0604020202020204" pitchFamily="34" charset="0"/>
+              </a:rPr>
+              <a:t>の技術解説</a:t>
+            </a:r>
           </a:p>
         </p:txBody>
       </p:sp>
@@ -3711,7 +3714,7 @@
           <p:cNvPr id="4" name="テキスト ボックス 3">
             <a:extLst>
               <a:ext uri="{FF2B5EF4-FFF2-40B4-BE49-F238E27FC236}">
-                <a16:creationId xmlns:a16="http://schemas.microsoft.com/office/drawing/2014/main" id="{9649D848-AD38-8367-3C1E-A3E31F1DF47F}"/>
+                <a16:creationId xmlns:a16="http://schemas.microsoft.com/office/drawing/2014/main" id="{160E1159-77C2-1FFB-9D08-E1DDD50DE1F5}"/>
               </a:ext>
             </a:extLst>
           </p:cNvPr>
@@ -3735,20 +3738,14 @@
           <a:lstStyle/>
           <a:p>
             <a:r>
-              <a:rPr kumimoji="1" lang="en-US" altLang="ja-JP" sz="2000">
+              <a:rPr kumimoji="1" lang="ja-JP" altLang="en-US" sz="2000">
                 <a:solidFill>
                   <a:srgbClr val="333333"/>
                 </a:solidFill>
                 <a:latin typeface="Arial" panose="020B0604020202020204" pitchFamily="34" charset="0"/>
               </a:rPr>
-              <a:t>Architecture, implementation and commit history in 75 seconds</a:t>
-            </a:r>
-            <a:endParaRPr kumimoji="1" lang="ja-JP" altLang="en-US" sz="2000">
-              <a:solidFill>
-                <a:srgbClr val="333333"/>
-              </a:solidFill>
-              <a:latin typeface="Arial" panose="020B0604020202020204" pitchFamily="34" charset="0"/>
-            </a:endParaRPr>
+              <a:t>設計・実装・コミットから学ぶ短時間プレビュー</a:t>
+            </a:r>
           </a:p>
         </p:txBody>
       </p:sp>
@@ -3757,7 +3754,7 @@
           <p:cNvPr id="5" name="テキスト ボックス 4">
             <a:extLst>
               <a:ext uri="{FF2B5EF4-FFF2-40B4-BE49-F238E27FC236}">
-                <a16:creationId xmlns:a16="http://schemas.microsoft.com/office/drawing/2014/main" id="{932A4317-64D4-6377-E160-61CA14AB9E02}"/>
+                <a16:creationId xmlns:a16="http://schemas.microsoft.com/office/drawing/2014/main" id="{BA8CB780-9BC8-50A6-55D7-657EAA078D7D}"/>
               </a:ext>
             </a:extLst>
           </p:cNvPr>
@@ -3804,7 +3801,7 @@
             <a:hlinkClick r:id="" action="ppaction://media"/>
             <a:extLst>
               <a:ext uri="{FF2B5EF4-FFF2-40B4-BE49-F238E27FC236}">
-                <a16:creationId xmlns:a16="http://schemas.microsoft.com/office/drawing/2014/main" id="{BDC24A64-5D7B-2BE7-D62B-58B6CE0C1F8B}"/>
+                <a16:creationId xmlns:a16="http://schemas.microsoft.com/office/drawing/2014/main" id="{1BD46E00-7645-AB8F-3699-D2C40423778C}"/>
               </a:ext>
             </a:extLst>
           </p:cNvPr>
@@ -3839,7 +3836,7 @@
     </p:spTree>
     <p:extLst>
       <p:ext uri="{BB962C8B-B14F-4D97-AF65-F5344CB8AC3E}">
-        <p14:creationId xmlns:p14="http://schemas.microsoft.com/office/powerpoint/2010/main" val="3940703854"/>
+        <p14:creationId xmlns:p14="http://schemas.microsoft.com/office/powerpoint/2010/main" val="2923861298"/>
       </p:ext>
     </p:extLst>
   </p:cSld>
@@ -3963,7 +3960,7 @@
           <p:cNvPr id="2" name="テキスト ボックス 1">
             <a:extLst>
               <a:ext uri="{FF2B5EF4-FFF2-40B4-BE49-F238E27FC236}">
-                <a16:creationId xmlns:a16="http://schemas.microsoft.com/office/drawing/2014/main" id="{63F13207-742E-CF83-DEE8-7D6E59A48221}"/>
+                <a16:creationId xmlns:a16="http://schemas.microsoft.com/office/drawing/2014/main" id="{B5ABE4AD-C7D0-0BB5-5B36-A097BD94F37B}"/>
               </a:ext>
             </a:extLst>
           </p:cNvPr>
@@ -4009,7 +4006,7 @@
           <p:cNvPr id="3" name="テキスト ボックス 2">
             <a:extLst>
               <a:ext uri="{FF2B5EF4-FFF2-40B4-BE49-F238E27FC236}">
-                <a16:creationId xmlns:a16="http://schemas.microsoft.com/office/drawing/2014/main" id="{9A523C4C-2FB8-007E-A400-F2F5ACEFDDFB}"/>
+                <a16:creationId xmlns:a16="http://schemas.microsoft.com/office/drawing/2014/main" id="{504A45D0-6540-1E65-2ED2-B9313A3155FA}"/>
               </a:ext>
             </a:extLst>
           </p:cNvPr>
@@ -4033,20 +4030,14 @@
           <a:lstStyle/>
           <a:p>
             <a:r>
-              <a:rPr kumimoji="1" lang="en-US" altLang="ja-JP" sz="3400" b="1">
+              <a:rPr kumimoji="1" lang="ja-JP" altLang="en-US" sz="3400" b="1">
                 <a:solidFill>
                   <a:srgbClr val="111111"/>
                 </a:solidFill>
                 <a:latin typeface="Arial" panose="020B0604020202020204" pitchFamily="34" charset="0"/>
               </a:rPr>
-              <a:t>WHAT DOES IT SOLVE?</a:t>
-            </a:r>
-            <a:endParaRPr kumimoji="1" lang="ja-JP" altLang="en-US" sz="3400" b="1">
-              <a:solidFill>
-                <a:srgbClr val="111111"/>
-              </a:solidFill>
-              <a:latin typeface="Arial" panose="020B0604020202020204" pitchFamily="34" charset="0"/>
-            </a:endParaRPr>
+              <a:t>このプロジェクトは何を解決する？</a:t>
+            </a:r>
           </a:p>
         </p:txBody>
       </p:sp>
@@ -4055,7 +4046,7 @@
           <p:cNvPr id="4" name="テキスト ボックス 3">
             <a:extLst>
               <a:ext uri="{FF2B5EF4-FFF2-40B4-BE49-F238E27FC236}">
-                <a16:creationId xmlns:a16="http://schemas.microsoft.com/office/drawing/2014/main" id="{93DA9192-EB25-D112-4FD0-FDB7055CB9FC}"/>
+                <a16:creationId xmlns:a16="http://schemas.microsoft.com/office/drawing/2014/main" id="{19D2A631-4026-12C3-6193-48720FA682F8}"/>
               </a:ext>
             </a:extLst>
           </p:cNvPr>
@@ -4101,7 +4092,7 @@
           <p:cNvPr id="5" name="テキスト ボックス 4">
             <a:extLst>
               <a:ext uri="{FF2B5EF4-FFF2-40B4-BE49-F238E27FC236}">
-                <a16:creationId xmlns:a16="http://schemas.microsoft.com/office/drawing/2014/main" id="{BFF2C958-477A-B0A5-9D98-9EBD0B3D3914}"/>
+                <a16:creationId xmlns:a16="http://schemas.microsoft.com/office/drawing/2014/main" id="{52D92C75-FECA-0564-F529-B0ABE8D0EB51}"/>
               </a:ext>
             </a:extLst>
           </p:cNvPr>
@@ -4148,7 +4139,7 @@
             <a:hlinkClick r:id="" action="ppaction://media"/>
             <a:extLst>
               <a:ext uri="{FF2B5EF4-FFF2-40B4-BE49-F238E27FC236}">
-                <a16:creationId xmlns:a16="http://schemas.microsoft.com/office/drawing/2014/main" id="{ADB4B365-B01D-8F6C-19C8-A5DEAC7C79D6}"/>
+                <a16:creationId xmlns:a16="http://schemas.microsoft.com/office/drawing/2014/main" id="{D43930C2-5240-C699-E233-3DCA270A04DC}"/>
               </a:ext>
             </a:extLst>
           </p:cNvPr>
@@ -4183,7 +4174,7 @@
     </p:spTree>
     <p:extLst>
       <p:ext uri="{BB962C8B-B14F-4D97-AF65-F5344CB8AC3E}">
-        <p14:creationId xmlns:p14="http://schemas.microsoft.com/office/powerpoint/2010/main" val="4249749024"/>
+        <p14:creationId xmlns:p14="http://schemas.microsoft.com/office/powerpoint/2010/main" val="2107224277"/>
       </p:ext>
     </p:extLst>
   </p:cSld>
@@ -4307,7 +4298,7 @@
           <p:cNvPr id="2" name="テキスト ボックス 1">
             <a:extLst>
               <a:ext uri="{FF2B5EF4-FFF2-40B4-BE49-F238E27FC236}">
-                <a16:creationId xmlns:a16="http://schemas.microsoft.com/office/drawing/2014/main" id="{2B87D4C2-AD63-0536-FD93-E761ED5C97A0}"/>
+                <a16:creationId xmlns:a16="http://schemas.microsoft.com/office/drawing/2014/main" id="{07E384E3-B8B6-03D4-DBE0-7E1A7850D444}"/>
               </a:ext>
             </a:extLst>
           </p:cNvPr>
@@ -4353,7 +4344,7 @@
           <p:cNvPr id="3" name="テキスト ボックス 2">
             <a:extLst>
               <a:ext uri="{FF2B5EF4-FFF2-40B4-BE49-F238E27FC236}">
-                <a16:creationId xmlns:a16="http://schemas.microsoft.com/office/drawing/2014/main" id="{34F7A109-A107-8B8E-0F53-AFC65483A71F}"/>
+                <a16:creationId xmlns:a16="http://schemas.microsoft.com/office/drawing/2014/main" id="{2D026239-EDE6-5A57-BBBC-01B6FDA052AF}"/>
               </a:ext>
             </a:extLst>
           </p:cNvPr>
@@ -4377,20 +4368,14 @@
           <a:lstStyle/>
           <a:p>
             <a:r>
-              <a:rPr kumimoji="1" lang="en-US" altLang="ja-JP" sz="3400" b="1">
+              <a:rPr kumimoji="1" lang="ja-JP" altLang="en-US" sz="3400" b="1">
                 <a:solidFill>
                   <a:srgbClr val="111111"/>
                 </a:solidFill>
                 <a:latin typeface="Arial" panose="020B0604020202020204" pitchFamily="34" charset="0"/>
               </a:rPr>
-              <a:t>TECH STACK</a:t>
-            </a:r>
-            <a:endParaRPr kumimoji="1" lang="ja-JP" altLang="en-US" sz="3400" b="1">
-              <a:solidFill>
-                <a:srgbClr val="111111"/>
-              </a:solidFill>
-              <a:latin typeface="Arial" panose="020B0604020202020204" pitchFamily="34" charset="0"/>
-            </a:endParaRPr>
+              <a:t>技術スタック</a:t>
+            </a:r>
           </a:p>
         </p:txBody>
       </p:sp>
@@ -4399,7 +4384,7 @@
           <p:cNvPr id="4" name="テキスト ボックス 3">
             <a:extLst>
               <a:ext uri="{FF2B5EF4-FFF2-40B4-BE49-F238E27FC236}">
-                <a16:creationId xmlns:a16="http://schemas.microsoft.com/office/drawing/2014/main" id="{92962EF3-6626-7B5F-3183-979BD194A006}"/>
+                <a16:creationId xmlns:a16="http://schemas.microsoft.com/office/drawing/2014/main" id="{6079AE91-ED12-CBCA-F83F-D76CD7401540}"/>
               </a:ext>
             </a:extLst>
           </p:cNvPr>
@@ -4409,7 +4394,7 @@
         <p:spPr>
           <a:xfrm>
             <a:off x="533400" y="3429000"/>
-            <a:ext cx="10795000" cy="400110"/>
+            <a:ext cx="10795000" cy="707886"/>
           </a:xfrm>
           <a:prstGeom prst="rect">
             <a:avLst/>
@@ -4423,13 +4408,22 @@
           <a:lstStyle/>
           <a:p>
             <a:r>
+              <a:rPr kumimoji="1" lang="ja-JP" altLang="en-US" sz="2000">
+                <a:solidFill>
+                  <a:srgbClr val="333333"/>
+                </a:solidFill>
+                <a:latin typeface="Arial" panose="020B0604020202020204" pitchFamily="34" charset="0"/>
+              </a:rPr>
+              <a:t>主要技術：</a:t>
+            </a:r>
+            <a:r>
               <a:rPr kumimoji="1" lang="en-US" altLang="ja-JP" sz="2000">
                 <a:solidFill>
                   <a:srgbClr val="333333"/>
                 </a:solidFill>
                 <a:latin typeface="Arial" panose="020B0604020202020204" pitchFamily="34" charset="0"/>
               </a:rPr>
-              <a:t>Primary technologies: TypeScript</a:t>
+              <a:t>TypeScript</a:t>
             </a:r>
             <a:r>
               <a:rPr kumimoji="1" lang="ja-JP" altLang="en-US" sz="2000">
@@ -4447,14 +4441,18 @@
                 </a:solidFill>
                 <a:latin typeface="Arial" panose="020B0604020202020204" pitchFamily="34" charset="0"/>
               </a:rPr>
-              <a:t>JavaScript</a:t>
-            </a:r>
-            <a:endParaRPr kumimoji="1" lang="ja-JP" altLang="en-US" sz="2000">
-              <a:solidFill>
-                <a:srgbClr val="333333"/>
-              </a:solidFill>
-              <a:latin typeface="Arial" panose="020B0604020202020204" pitchFamily="34" charset="0"/>
-            </a:endParaRPr>
+              <a:t>JavaScript
+</a:t>
+            </a:r>
+            <a:r>
+              <a:rPr kumimoji="1" lang="ja-JP" altLang="en-US" sz="2000">
+                <a:solidFill>
+                  <a:srgbClr val="333333"/>
+                </a:solidFill>
+                <a:latin typeface="Arial" panose="020B0604020202020204" pitchFamily="34" charset="0"/>
+              </a:rPr>
+              <a:t>役割を分け、保守しやすい構成を目指しています。</a:t>
+            </a:r>
           </a:p>
         </p:txBody>
       </p:sp>
@@ -4463,7 +4461,7 @@
           <p:cNvPr id="5" name="テキスト ボックス 4">
             <a:extLst>
               <a:ext uri="{FF2B5EF4-FFF2-40B4-BE49-F238E27FC236}">
-                <a16:creationId xmlns:a16="http://schemas.microsoft.com/office/drawing/2014/main" id="{6AB77FCD-8C52-544C-1A9B-3B987B63C4ED}"/>
+                <a16:creationId xmlns:a16="http://schemas.microsoft.com/office/drawing/2014/main" id="{CE534D32-E43C-4D25-4A8A-1D3E9A8A57F7}"/>
               </a:ext>
             </a:extLst>
           </p:cNvPr>
@@ -4510,7 +4508,7 @@
             <a:hlinkClick r:id="" action="ppaction://media"/>
             <a:extLst>
               <a:ext uri="{FF2B5EF4-FFF2-40B4-BE49-F238E27FC236}">
-                <a16:creationId xmlns:a16="http://schemas.microsoft.com/office/drawing/2014/main" id="{47F6335F-E90D-4835-BA88-70196986D666}"/>
+                <a16:creationId xmlns:a16="http://schemas.microsoft.com/office/drawing/2014/main" id="{FE030C3D-040C-A085-390B-51F8D536488D}"/>
               </a:ext>
             </a:extLst>
           </p:cNvPr>
@@ -4545,7 +4543,7 @@
     </p:spTree>
     <p:extLst>
       <p:ext uri="{BB962C8B-B14F-4D97-AF65-F5344CB8AC3E}">
-        <p14:creationId xmlns:p14="http://schemas.microsoft.com/office/powerpoint/2010/main" val="231449078"/>
+        <p14:creationId xmlns:p14="http://schemas.microsoft.com/office/powerpoint/2010/main" val="3911923952"/>
       </p:ext>
     </p:extLst>
   </p:cSld>
@@ -4669,7 +4667,7 @@
           <p:cNvPr id="2" name="テキスト ボックス 1">
             <a:extLst>
               <a:ext uri="{FF2B5EF4-FFF2-40B4-BE49-F238E27FC236}">
-                <a16:creationId xmlns:a16="http://schemas.microsoft.com/office/drawing/2014/main" id="{F905BA00-0040-3CE3-AC66-0205EC45D785}"/>
+                <a16:creationId xmlns:a16="http://schemas.microsoft.com/office/drawing/2014/main" id="{93A9CB27-E9DE-CB01-21A9-12A2F99D99E4}"/>
               </a:ext>
             </a:extLst>
           </p:cNvPr>
@@ -4715,7 +4713,7 @@
           <p:cNvPr id="3" name="テキスト ボックス 2">
             <a:extLst>
               <a:ext uri="{FF2B5EF4-FFF2-40B4-BE49-F238E27FC236}">
-                <a16:creationId xmlns:a16="http://schemas.microsoft.com/office/drawing/2014/main" id="{80534D82-8101-D597-9D66-764E51DEE9F6}"/>
+                <a16:creationId xmlns:a16="http://schemas.microsoft.com/office/drawing/2014/main" id="{5849245A-E066-2CA2-1FE6-80459CADF0FA}"/>
               </a:ext>
             </a:extLst>
           </p:cNvPr>
@@ -4739,20 +4737,14 @@
           <a:lstStyle/>
           <a:p>
             <a:r>
-              <a:rPr kumimoji="1" lang="en-US" altLang="ja-JP" sz="3400" b="1">
+              <a:rPr kumimoji="1" lang="ja-JP" altLang="en-US" sz="3400" b="1">
                 <a:solidFill>
                   <a:srgbClr val="111111"/>
                 </a:solidFill>
                 <a:latin typeface="Arial" panose="020B0604020202020204" pitchFamily="34" charset="0"/>
               </a:rPr>
-              <a:t>REPOSITORY HIGHLIGHTS</a:t>
-            </a:r>
-            <a:endParaRPr kumimoji="1" lang="ja-JP" altLang="en-US" sz="3400" b="1">
-              <a:solidFill>
-                <a:srgbClr val="111111"/>
-              </a:solidFill>
-              <a:latin typeface="Arial" panose="020B0604020202020204" pitchFamily="34" charset="0"/>
-            </a:endParaRPr>
+              <a:t>リポジトリの読みどころ</a:t>
+            </a:r>
           </a:p>
         </p:txBody>
       </p:sp>
@@ -4761,7 +4753,7 @@
           <p:cNvPr id="4" name="テキスト ボックス 3">
             <a:extLst>
               <a:ext uri="{FF2B5EF4-FFF2-40B4-BE49-F238E27FC236}">
-                <a16:creationId xmlns:a16="http://schemas.microsoft.com/office/drawing/2014/main" id="{C9CEE13B-7EEE-FC90-0A36-34010F76C4A4}"/>
+                <a16:creationId xmlns:a16="http://schemas.microsoft.com/office/drawing/2014/main" id="{83767F12-FE75-9F07-E520-A88457D580E9}"/>
               </a:ext>
             </a:extLst>
           </p:cNvPr>
@@ -4771,7 +4763,7 @@
         <p:spPr>
           <a:xfrm>
             <a:off x="533400" y="3429000"/>
-            <a:ext cx="10795000" cy="400110"/>
+            <a:ext cx="10795000" cy="707886"/>
           </a:xfrm>
           <a:prstGeom prst="rect">
             <a:avLst/>
@@ -4785,13 +4777,77 @@
           <a:lstStyle/>
           <a:p>
             <a:r>
+              <a:rPr kumimoji="1" lang="ja-JP" altLang="en-US" sz="2000">
+                <a:solidFill>
+                  <a:srgbClr val="333333"/>
+                </a:solidFill>
+                <a:latin typeface="Arial" panose="020B0604020202020204" pitchFamily="34" charset="0"/>
+              </a:rPr>
+              <a:t>公開コード、</a:t>
+            </a:r>
+            <a:r>
               <a:rPr kumimoji="1" lang="en-US" altLang="ja-JP" sz="2000">
                 <a:solidFill>
                   <a:srgbClr val="333333"/>
                 </a:solidFill>
                 <a:latin typeface="Arial" panose="020B0604020202020204" pitchFamily="34" charset="0"/>
               </a:rPr>
-              <a:t>Public source code, README and commit history reveal the design decisions.</a:t>
+              <a:t>README</a:t>
+            </a:r>
+            <a:r>
+              <a:rPr kumimoji="1" lang="ja-JP" altLang="en-US" sz="2000">
+                <a:solidFill>
+                  <a:srgbClr val="333333"/>
+                </a:solidFill>
+                <a:latin typeface="Arial" panose="020B0604020202020204" pitchFamily="34" charset="0"/>
+              </a:rPr>
+              <a:t>、コミット履歴から設計判断を確認できます。
+主なファイル：</a:t>
+            </a:r>
+            <a:r>
+              <a:rPr kumimoji="1" lang="en-US" altLang="ja-JP" sz="2000">
+                <a:solidFill>
+                  <a:srgbClr val="333333"/>
+                </a:solidFill>
+                <a:latin typeface="Arial" panose="020B0604020202020204" pitchFamily="34" charset="0"/>
+              </a:rPr>
+              <a:t>README.md</a:t>
+            </a:r>
+            <a:r>
+              <a:rPr kumimoji="1" lang="ja-JP" altLang="en-US" sz="2000">
+                <a:solidFill>
+                  <a:srgbClr val="333333"/>
+                </a:solidFill>
+                <a:latin typeface="Arial" panose="020B0604020202020204" pitchFamily="34" charset="0"/>
+              </a:rPr>
+              <a:t>、</a:t>
+            </a:r>
+            <a:r>
+              <a:rPr kumimoji="1" lang="en-US" altLang="ja-JP" sz="2000">
+                <a:solidFill>
+                  <a:srgbClr val="333333"/>
+                </a:solidFill>
+                <a:latin typeface="Arial" panose="020B0604020202020204" pitchFamily="34" charset="0"/>
+              </a:rPr>
+              <a:t>app</a:t>
+            </a:r>
+            <a:r>
+              <a:rPr kumimoji="1" lang="ja-JP" altLang="en-US" sz="2000">
+                <a:solidFill>
+                  <a:srgbClr val="333333"/>
+                </a:solidFill>
+                <a:latin typeface="Arial" panose="020B0604020202020204" pitchFamily="34" charset="0"/>
+              </a:rPr>
+              <a:t>、</a:t>
+            </a:r>
+            <a:r>
+              <a:rPr kumimoji="1" lang="en-US" altLang="ja-JP" sz="2000">
+                <a:solidFill>
+                  <a:srgbClr val="333333"/>
+                </a:solidFill>
+                <a:latin typeface="Arial" panose="020B0604020202020204" pitchFamily="34" charset="0"/>
+              </a:rPr>
+              <a:t>build</a:t>
             </a:r>
             <a:endParaRPr kumimoji="1" lang="ja-JP" altLang="en-US" sz="2000">
               <a:solidFill>
@@ -4807,7 +4863,7 @@
           <p:cNvPr id="5" name="テキスト ボックス 4">
             <a:extLst>
               <a:ext uri="{FF2B5EF4-FFF2-40B4-BE49-F238E27FC236}">
-                <a16:creationId xmlns:a16="http://schemas.microsoft.com/office/drawing/2014/main" id="{2CDD6B6D-4020-DF68-32DA-938274B83070}"/>
+                <a16:creationId xmlns:a16="http://schemas.microsoft.com/office/drawing/2014/main" id="{D8E6945F-E84B-20DA-2A19-EDE8FBE409E5}"/>
               </a:ext>
             </a:extLst>
           </p:cNvPr>
@@ -4854,7 +4910,7 @@
             <a:hlinkClick r:id="" action="ppaction://media"/>
             <a:extLst>
               <a:ext uri="{FF2B5EF4-FFF2-40B4-BE49-F238E27FC236}">
-                <a16:creationId xmlns:a16="http://schemas.microsoft.com/office/drawing/2014/main" id="{16870CA9-A6BB-8838-D601-25AEFCEA9AD3}"/>
+                <a16:creationId xmlns:a16="http://schemas.microsoft.com/office/drawing/2014/main" id="{C336E7E8-B995-E05A-1EE3-F660BF120895}"/>
               </a:ext>
             </a:extLst>
           </p:cNvPr>
@@ -4889,7 +4945,7 @@
     </p:spTree>
     <p:extLst>
       <p:ext uri="{BB962C8B-B14F-4D97-AF65-F5344CB8AC3E}">
-        <p14:creationId xmlns:p14="http://schemas.microsoft.com/office/powerpoint/2010/main" val="1351806655"/>
+        <p14:creationId xmlns:p14="http://schemas.microsoft.com/office/powerpoint/2010/main" val="3052416119"/>
       </p:ext>
     </p:extLst>
   </p:cSld>
@@ -5013,7 +5069,7 @@
           <p:cNvPr id="2" name="テキスト ボックス 1">
             <a:extLst>
               <a:ext uri="{FF2B5EF4-FFF2-40B4-BE49-F238E27FC236}">
-                <a16:creationId xmlns:a16="http://schemas.microsoft.com/office/drawing/2014/main" id="{372E6100-818C-40F9-73A3-F2A4185C7984}"/>
+                <a16:creationId xmlns:a16="http://schemas.microsoft.com/office/drawing/2014/main" id="{44D36C25-7FF6-E025-8B40-E59A9FEA3503}"/>
               </a:ext>
             </a:extLst>
           </p:cNvPr>
@@ -5059,7 +5115,7 @@
           <p:cNvPr id="3" name="テキスト ボックス 2">
             <a:extLst>
               <a:ext uri="{FF2B5EF4-FFF2-40B4-BE49-F238E27FC236}">
-                <a16:creationId xmlns:a16="http://schemas.microsoft.com/office/drawing/2014/main" id="{0C309BB5-7BA1-9D16-0B39-BB337D792A53}"/>
+                <a16:creationId xmlns:a16="http://schemas.microsoft.com/office/drawing/2014/main" id="{476C2FB9-CAE4-6D21-45C7-4AB5D62A58EA}"/>
               </a:ext>
             </a:extLst>
           </p:cNvPr>
@@ -5083,20 +5139,14 @@
           <a:lstStyle/>
           <a:p>
             <a:r>
-              <a:rPr kumimoji="1" lang="en-US" altLang="ja-JP" sz="3400" b="1">
+              <a:rPr kumimoji="1" lang="ja-JP" altLang="en-US" sz="3400" b="1">
                 <a:solidFill>
                   <a:srgbClr val="111111"/>
                 </a:solidFill>
                 <a:latin typeface="Arial" panose="020B0604020202020204" pitchFamily="34" charset="0"/>
               </a:rPr>
-              <a:t>ITERATIVE IMPROVEMENT</a:t>
-            </a:r>
-            <a:endParaRPr kumimoji="1" lang="ja-JP" altLang="en-US" sz="3400" b="1">
-              <a:solidFill>
-                <a:srgbClr val="111111"/>
-              </a:solidFill>
-              <a:latin typeface="Arial" panose="020B0604020202020204" pitchFamily="34" charset="0"/>
-            </a:endParaRPr>
+              <a:t>コミットから分かる改善</a:t>
+            </a:r>
           </a:p>
         </p:txBody>
       </p:sp>
@@ -5105,7 +5155,7 @@
           <p:cNvPr id="4" name="テキスト ボックス 3">
             <a:extLst>
               <a:ext uri="{FF2B5EF4-FFF2-40B4-BE49-F238E27FC236}">
-                <a16:creationId xmlns:a16="http://schemas.microsoft.com/office/drawing/2014/main" id="{C7404284-E25E-CE49-CA9D-3FC5B3DE75D7}"/>
+                <a16:creationId xmlns:a16="http://schemas.microsoft.com/office/drawing/2014/main" id="{1C54EACB-B028-605F-7A23-4EBF27312A5D}"/>
               </a:ext>
             </a:extLst>
           </p:cNvPr>
@@ -5135,7 +5185,7 @@
                 </a:solidFill>
                 <a:latin typeface="Arial" panose="020B0604020202020204" pitchFamily="34" charset="0"/>
               </a:rPr>
-              <a:t>Small commits continuously improve features, quality and release readiness.</a:t>
+              <a:t>Configure private site hosting</a:t>
             </a:r>
             <a:endParaRPr kumimoji="1" lang="ja-JP" altLang="en-US" sz="2000">
               <a:solidFill>
@@ -5151,7 +5201,7 @@
           <p:cNvPr id="5" name="テキスト ボックス 4">
             <a:extLst>
               <a:ext uri="{FF2B5EF4-FFF2-40B4-BE49-F238E27FC236}">
-                <a16:creationId xmlns:a16="http://schemas.microsoft.com/office/drawing/2014/main" id="{3C5A0B23-BBC4-EF19-958C-282C6BB03AE4}"/>
+                <a16:creationId xmlns:a16="http://schemas.microsoft.com/office/drawing/2014/main" id="{B961C15D-C50C-4DA8-4234-B2E56B2742EB}"/>
               </a:ext>
             </a:extLst>
           </p:cNvPr>
@@ -5198,7 +5248,7 @@
             <a:hlinkClick r:id="" action="ppaction://media"/>
             <a:extLst>
               <a:ext uri="{FF2B5EF4-FFF2-40B4-BE49-F238E27FC236}">
-                <a16:creationId xmlns:a16="http://schemas.microsoft.com/office/drawing/2014/main" id="{93799FB2-A9C5-B114-B1AB-931BA8A34CE9}"/>
+                <a16:creationId xmlns:a16="http://schemas.microsoft.com/office/drawing/2014/main" id="{5641C74A-7862-995C-63FB-DB8B9B3CA00E}"/>
               </a:ext>
             </a:extLst>
           </p:cNvPr>
@@ -5233,7 +5283,7 @@
     </p:spTree>
     <p:extLst>
       <p:ext uri="{BB962C8B-B14F-4D97-AF65-F5344CB8AC3E}">
-        <p14:creationId xmlns:p14="http://schemas.microsoft.com/office/powerpoint/2010/main" val="3022320138"/>
+        <p14:creationId xmlns:p14="http://schemas.microsoft.com/office/powerpoint/2010/main" val="556264252"/>
       </p:ext>
     </p:extLst>
   </p:cSld>
@@ -5357,7 +5407,7 @@
           <p:cNvPr id="2" name="テキスト ボックス 1">
             <a:extLst>
               <a:ext uri="{FF2B5EF4-FFF2-40B4-BE49-F238E27FC236}">
-                <a16:creationId xmlns:a16="http://schemas.microsoft.com/office/drawing/2014/main" id="{A42B88CA-7320-A1F5-6B1B-C85419E31E48}"/>
+                <a16:creationId xmlns:a16="http://schemas.microsoft.com/office/drawing/2014/main" id="{301C3BCE-2393-0BF3-D547-75539048CD20}"/>
               </a:ext>
             </a:extLst>
           </p:cNvPr>
@@ -5403,7 +5453,7 @@
           <p:cNvPr id="3" name="テキスト ボックス 2">
             <a:extLst>
               <a:ext uri="{FF2B5EF4-FFF2-40B4-BE49-F238E27FC236}">
-                <a16:creationId xmlns:a16="http://schemas.microsoft.com/office/drawing/2014/main" id="{33A68CCC-70DA-5CCD-7059-D348E7B6759D}"/>
+                <a16:creationId xmlns:a16="http://schemas.microsoft.com/office/drawing/2014/main" id="{24E2DACF-37F2-77CE-1B0D-52B87D82975E}"/>
               </a:ext>
             </a:extLst>
           </p:cNvPr>
@@ -5427,20 +5477,14 @@
           <a:lstStyle/>
           <a:p>
             <a:r>
-              <a:rPr kumimoji="1" lang="en-US" altLang="ja-JP" sz="3400" b="1">
+              <a:rPr kumimoji="1" lang="ja-JP" altLang="en-US" sz="3400" b="1">
                 <a:solidFill>
                   <a:srgbClr val="111111"/>
                 </a:solidFill>
                 <a:latin typeface="Arial" panose="020B0604020202020204" pitchFamily="34" charset="0"/>
               </a:rPr>
-              <a:t>READ THE FULL ARTICLE</a:t>
-            </a:r>
-            <a:endParaRPr kumimoji="1" lang="ja-JP" altLang="en-US" sz="3400" b="1">
-              <a:solidFill>
-                <a:srgbClr val="111111"/>
-              </a:solidFill>
-              <a:latin typeface="Arial" panose="020B0604020202020204" pitchFamily="34" charset="0"/>
-            </a:endParaRPr>
+              <a:t>詳しくは積み上げログへ</a:t>
+            </a:r>
           </a:p>
         </p:txBody>
       </p:sp>
@@ -5449,7 +5493,7 @@
           <p:cNvPr id="4" name="テキスト ボックス 3">
             <a:extLst>
               <a:ext uri="{FF2B5EF4-FFF2-40B4-BE49-F238E27FC236}">
-                <a16:creationId xmlns:a16="http://schemas.microsoft.com/office/drawing/2014/main" id="{43090A75-74CE-4309-2223-148827564473}"/>
+                <a16:creationId xmlns:a16="http://schemas.microsoft.com/office/drawing/2014/main" id="{633167CA-B983-B136-7CB3-A3CDCE08B1B1}"/>
               </a:ext>
             </a:extLst>
           </p:cNvPr>
@@ -5473,14 +5517,32 @@
           <a:lstStyle/>
           <a:p>
             <a:r>
-              <a:rPr kumimoji="1" lang="sv-SE" altLang="ja-JP" sz="2000">
+              <a:rPr kumimoji="1" lang="zh-TW" altLang="en-US" sz="2000">
+                <a:solidFill>
+                  <a:srgbClr val="333333"/>
+                </a:solidFill>
+                <a:latin typeface="Arial" panose="020B0604020202020204" pitchFamily="34" charset="0"/>
+              </a:rPr>
+              <a:t>記事： </a:t>
+            </a:r>
+            <a:r>
+              <a:rPr kumimoji="1" lang="en-US" altLang="zh-TW" sz="2000">
                 <a:solidFill>
                   <a:srgbClr val="333333"/>
                 </a:solidFill>
                 <a:latin typeface="Arial" panose="020B0604020202020204" pitchFamily="34" charset="0"/>
               </a:rPr>
               <a:t>https://syunnjack.dev/articles/cosme-stock-alert
-TSUMIAGE LOG</a:t>
+</a:t>
+            </a:r>
+            <a:r>
+              <a:rPr kumimoji="1" lang="zh-TW" altLang="en-US" sz="2000">
+                <a:solidFill>
+                  <a:srgbClr val="333333"/>
+                </a:solidFill>
+                <a:latin typeface="Arial" panose="020B0604020202020204" pitchFamily="34" charset="0"/>
+              </a:rPr>
+              <a:t>学び、作り、振り返る開発記録。</a:t>
             </a:r>
             <a:endParaRPr kumimoji="1" lang="ja-JP" altLang="en-US" sz="2000">
               <a:solidFill>
@@ -5496,7 +5558,7 @@
           <p:cNvPr id="5" name="テキスト ボックス 4">
             <a:extLst>
               <a:ext uri="{FF2B5EF4-FFF2-40B4-BE49-F238E27FC236}">
-                <a16:creationId xmlns:a16="http://schemas.microsoft.com/office/drawing/2014/main" id="{51B3F9B4-C90E-55A5-BE5D-1FDE08580B91}"/>
+                <a16:creationId xmlns:a16="http://schemas.microsoft.com/office/drawing/2014/main" id="{BA00AAEB-53B9-FBE5-F3CF-4028BA63406C}"/>
               </a:ext>
             </a:extLst>
           </p:cNvPr>
@@ -5543,7 +5605,7 @@
             <a:hlinkClick r:id="" action="ppaction://media"/>
             <a:extLst>
               <a:ext uri="{FF2B5EF4-FFF2-40B4-BE49-F238E27FC236}">
-                <a16:creationId xmlns:a16="http://schemas.microsoft.com/office/drawing/2014/main" id="{FC13EFF4-67BE-66D0-E96D-DB38432EE008}"/>
+                <a16:creationId xmlns:a16="http://schemas.microsoft.com/office/drawing/2014/main" id="{ED12586E-F5A2-B5E8-7479-B6DA1A2330BA}"/>
               </a:ext>
             </a:extLst>
           </p:cNvPr>
@@ -5578,7 +5640,7 @@
     </p:spTree>
     <p:extLst>
       <p:ext uri="{BB962C8B-B14F-4D97-AF65-F5344CB8AC3E}">
-        <p14:creationId xmlns:p14="http://schemas.microsoft.com/office/powerpoint/2010/main" val="2538775222"/>
+        <p14:creationId xmlns:p14="http://schemas.microsoft.com/office/powerpoint/2010/main" val="2011547187"/>
       </p:ext>
     </p:extLst>
   </p:cSld>

--- a/public/videos/repositories/cosme-stock-alert/cosme-stock-alert-tech-preview.pptx
+++ b/public/videos/repositories/cosme-stock-alert/cosme-stock-alert-tech-preview.pptx
@@ -134,7 +134,7 @@
           <p:cNvPr id="2" name="タイトル 1">
             <a:extLst>
               <a:ext uri="{FF2B5EF4-FFF2-40B4-BE49-F238E27FC236}">
-                <a16:creationId xmlns:a16="http://schemas.microsoft.com/office/drawing/2014/main" id="{1191C30E-E774-22C4-5738-45BB4B51680C}"/>
+                <a16:creationId xmlns:a16="http://schemas.microsoft.com/office/drawing/2014/main" id="{37F09192-6030-54A0-02C2-E0F6EC9A21BA}"/>
               </a:ext>
             </a:extLst>
           </p:cNvPr>
@@ -171,7 +171,7 @@
           <p:cNvPr id="3" name="字幕 2">
             <a:extLst>
               <a:ext uri="{FF2B5EF4-FFF2-40B4-BE49-F238E27FC236}">
-                <a16:creationId xmlns:a16="http://schemas.microsoft.com/office/drawing/2014/main" id="{9B7DE4FC-E25D-08C5-B3FB-C72842B7FD4C}"/>
+                <a16:creationId xmlns:a16="http://schemas.microsoft.com/office/drawing/2014/main" id="{D6FBD969-05E2-7253-5C4A-88E5B6BAE10F}"/>
               </a:ext>
             </a:extLst>
           </p:cNvPr>
@@ -241,7 +241,7 @@
           <p:cNvPr id="4" name="日付プレースホルダー 3">
             <a:extLst>
               <a:ext uri="{FF2B5EF4-FFF2-40B4-BE49-F238E27FC236}">
-                <a16:creationId xmlns:a16="http://schemas.microsoft.com/office/drawing/2014/main" id="{FBBDF2CA-67C2-57A3-E69C-3091273239C9}"/>
+                <a16:creationId xmlns:a16="http://schemas.microsoft.com/office/drawing/2014/main" id="{6B3939CA-39C8-6AEC-806D-A0640A968B2A}"/>
               </a:ext>
             </a:extLst>
           </p:cNvPr>
@@ -257,7 +257,7 @@
           <a:bodyPr/>
           <a:lstStyle/>
           <a:p>
-            <a:fld id="{67DAE527-8467-40DE-95AF-A610E0AB2909}" type="datetimeFigureOut">
+            <a:fld id="{721A9336-96E6-46F3-BA68-05969BBC16EA}" type="datetimeFigureOut">
               <a:rPr kumimoji="1" lang="ja-JP" altLang="en-US" smtClean="0"/>
               <a:t>2026/7/30</a:t>
             </a:fld>
@@ -270,7 +270,7 @@
           <p:cNvPr id="5" name="フッター プレースホルダー 4">
             <a:extLst>
               <a:ext uri="{FF2B5EF4-FFF2-40B4-BE49-F238E27FC236}">
-                <a16:creationId xmlns:a16="http://schemas.microsoft.com/office/drawing/2014/main" id="{2CBF0FE3-0D3B-B55E-9CE0-C54C25D567B6}"/>
+                <a16:creationId xmlns:a16="http://schemas.microsoft.com/office/drawing/2014/main" id="{EBE8D9AE-3F17-F9F3-6291-038F713799AB}"/>
               </a:ext>
             </a:extLst>
           </p:cNvPr>
@@ -295,7 +295,7 @@
           <p:cNvPr id="6" name="スライド番号プレースホルダー 5">
             <a:extLst>
               <a:ext uri="{FF2B5EF4-FFF2-40B4-BE49-F238E27FC236}">
-                <a16:creationId xmlns:a16="http://schemas.microsoft.com/office/drawing/2014/main" id="{0BA07809-F738-4A15-B3D6-77DAEC11A2E8}"/>
+                <a16:creationId xmlns:a16="http://schemas.microsoft.com/office/drawing/2014/main" id="{7892405D-2575-9FF2-B92C-5DC70FD39042}"/>
               </a:ext>
             </a:extLst>
           </p:cNvPr>
@@ -311,7 +311,7 @@
           <a:bodyPr/>
           <a:lstStyle/>
           <a:p>
-            <a:fld id="{C342AFD4-742E-43D6-9723-44C73474E714}" type="slidenum">
+            <a:fld id="{9DC27E15-2A5C-48BF-B85B-F7AE2C385561}" type="slidenum">
               <a:rPr kumimoji="1" lang="ja-JP" altLang="en-US" smtClean="0"/>
               <a:t>‹#›</a:t>
             </a:fld>
@@ -322,7 +322,7 @@
     </p:spTree>
     <p:extLst>
       <p:ext uri="{BB962C8B-B14F-4D97-AF65-F5344CB8AC3E}">
-        <p14:creationId xmlns:p14="http://schemas.microsoft.com/office/powerpoint/2010/main" val="1038524660"/>
+        <p14:creationId xmlns:p14="http://schemas.microsoft.com/office/powerpoint/2010/main" val="1704112377"/>
       </p:ext>
     </p:extLst>
   </p:cSld>
@@ -354,7 +354,7 @@
           <p:cNvPr id="2" name="タイトル 1">
             <a:extLst>
               <a:ext uri="{FF2B5EF4-FFF2-40B4-BE49-F238E27FC236}">
-                <a16:creationId xmlns:a16="http://schemas.microsoft.com/office/drawing/2014/main" id="{330A110B-44C0-1888-4C72-40A5797FF829}"/>
+                <a16:creationId xmlns:a16="http://schemas.microsoft.com/office/drawing/2014/main" id="{13889018-6F68-650A-0747-CD4B85E01DDB}"/>
               </a:ext>
             </a:extLst>
           </p:cNvPr>
@@ -382,7 +382,7 @@
           <p:cNvPr id="3" name="縦書きテキスト プレースホルダー 2">
             <a:extLst>
               <a:ext uri="{FF2B5EF4-FFF2-40B4-BE49-F238E27FC236}">
-                <a16:creationId xmlns:a16="http://schemas.microsoft.com/office/drawing/2014/main" id="{724156C2-FF61-B351-3160-C2060D00AA7A}"/>
+                <a16:creationId xmlns:a16="http://schemas.microsoft.com/office/drawing/2014/main" id="{66F8A0C0-54EB-0C2C-78E8-04B098CCF30D}"/>
               </a:ext>
             </a:extLst>
           </p:cNvPr>
@@ -471,7 +471,7 @@
           <p:cNvPr id="4" name="日付プレースホルダー 3">
             <a:extLst>
               <a:ext uri="{FF2B5EF4-FFF2-40B4-BE49-F238E27FC236}">
-                <a16:creationId xmlns:a16="http://schemas.microsoft.com/office/drawing/2014/main" id="{63B3C5A7-84A3-B322-2C8B-AE2C0AFFE24B}"/>
+                <a16:creationId xmlns:a16="http://schemas.microsoft.com/office/drawing/2014/main" id="{35B90EDF-E0FE-B3F2-4FD4-0E10690B4FA8}"/>
               </a:ext>
             </a:extLst>
           </p:cNvPr>
@@ -487,7 +487,7 @@
           <a:bodyPr/>
           <a:lstStyle/>
           <a:p>
-            <a:fld id="{67DAE527-8467-40DE-95AF-A610E0AB2909}" type="datetimeFigureOut">
+            <a:fld id="{721A9336-96E6-46F3-BA68-05969BBC16EA}" type="datetimeFigureOut">
               <a:rPr kumimoji="1" lang="ja-JP" altLang="en-US" smtClean="0"/>
               <a:t>2026/7/30</a:t>
             </a:fld>
@@ -500,7 +500,7 @@
           <p:cNvPr id="5" name="フッター プレースホルダー 4">
             <a:extLst>
               <a:ext uri="{FF2B5EF4-FFF2-40B4-BE49-F238E27FC236}">
-                <a16:creationId xmlns:a16="http://schemas.microsoft.com/office/drawing/2014/main" id="{2B2FA2EF-C6A2-62BF-EF9A-9A39E8265349}"/>
+                <a16:creationId xmlns:a16="http://schemas.microsoft.com/office/drawing/2014/main" id="{AC354025-5F67-1C12-8895-602B67CA8AEE}"/>
               </a:ext>
             </a:extLst>
           </p:cNvPr>
@@ -525,7 +525,7 @@
           <p:cNvPr id="6" name="スライド番号プレースホルダー 5">
             <a:extLst>
               <a:ext uri="{FF2B5EF4-FFF2-40B4-BE49-F238E27FC236}">
-                <a16:creationId xmlns:a16="http://schemas.microsoft.com/office/drawing/2014/main" id="{699CC754-0E57-F2B9-C9CB-627C9BAD4314}"/>
+                <a16:creationId xmlns:a16="http://schemas.microsoft.com/office/drawing/2014/main" id="{6026B943-CF69-D136-A757-F7D4A99F44F4}"/>
               </a:ext>
             </a:extLst>
           </p:cNvPr>
@@ -541,7 +541,7 @@
           <a:bodyPr/>
           <a:lstStyle/>
           <a:p>
-            <a:fld id="{C342AFD4-742E-43D6-9723-44C73474E714}" type="slidenum">
+            <a:fld id="{9DC27E15-2A5C-48BF-B85B-F7AE2C385561}" type="slidenum">
               <a:rPr kumimoji="1" lang="ja-JP" altLang="en-US" smtClean="0"/>
               <a:t>‹#›</a:t>
             </a:fld>
@@ -552,7 +552,7 @@
     </p:spTree>
     <p:extLst>
       <p:ext uri="{BB962C8B-B14F-4D97-AF65-F5344CB8AC3E}">
-        <p14:creationId xmlns:p14="http://schemas.microsoft.com/office/powerpoint/2010/main" val="2969576668"/>
+        <p14:creationId xmlns:p14="http://schemas.microsoft.com/office/powerpoint/2010/main" val="3105408539"/>
       </p:ext>
     </p:extLst>
   </p:cSld>
@@ -584,7 +584,7 @@
           <p:cNvPr id="2" name="縦書きタイトル 1">
             <a:extLst>
               <a:ext uri="{FF2B5EF4-FFF2-40B4-BE49-F238E27FC236}">
-                <a16:creationId xmlns:a16="http://schemas.microsoft.com/office/drawing/2014/main" id="{CC1BD3BF-4BB2-B282-757E-68744EDDC17E}"/>
+                <a16:creationId xmlns:a16="http://schemas.microsoft.com/office/drawing/2014/main" id="{FF4D125F-D4CB-80EB-5C6C-75524FB0698F}"/>
               </a:ext>
             </a:extLst>
           </p:cNvPr>
@@ -617,7 +617,7 @@
           <p:cNvPr id="3" name="縦書きテキスト プレースホルダー 2">
             <a:extLst>
               <a:ext uri="{FF2B5EF4-FFF2-40B4-BE49-F238E27FC236}">
-                <a16:creationId xmlns:a16="http://schemas.microsoft.com/office/drawing/2014/main" id="{6CAE4F8F-4A7F-BB8A-25B4-57480BBC61E3}"/>
+                <a16:creationId xmlns:a16="http://schemas.microsoft.com/office/drawing/2014/main" id="{5B5FBED3-A5D6-1102-221C-FE41633BEDAA}"/>
               </a:ext>
             </a:extLst>
           </p:cNvPr>
@@ -711,7 +711,7 @@
           <p:cNvPr id="4" name="日付プレースホルダー 3">
             <a:extLst>
               <a:ext uri="{FF2B5EF4-FFF2-40B4-BE49-F238E27FC236}">
-                <a16:creationId xmlns:a16="http://schemas.microsoft.com/office/drawing/2014/main" id="{F9FE3FE4-4308-D479-1BC4-F7A33D371CC7}"/>
+                <a16:creationId xmlns:a16="http://schemas.microsoft.com/office/drawing/2014/main" id="{A1832BAB-2196-9268-6C63-295265AE7744}"/>
               </a:ext>
             </a:extLst>
           </p:cNvPr>
@@ -727,7 +727,7 @@
           <a:bodyPr/>
           <a:lstStyle/>
           <a:p>
-            <a:fld id="{67DAE527-8467-40DE-95AF-A610E0AB2909}" type="datetimeFigureOut">
+            <a:fld id="{721A9336-96E6-46F3-BA68-05969BBC16EA}" type="datetimeFigureOut">
               <a:rPr kumimoji="1" lang="ja-JP" altLang="en-US" smtClean="0"/>
               <a:t>2026/7/30</a:t>
             </a:fld>
@@ -740,7 +740,7 @@
           <p:cNvPr id="5" name="フッター プレースホルダー 4">
             <a:extLst>
               <a:ext uri="{FF2B5EF4-FFF2-40B4-BE49-F238E27FC236}">
-                <a16:creationId xmlns:a16="http://schemas.microsoft.com/office/drawing/2014/main" id="{D2EA1811-F04B-FB42-1443-1587688CC0BF}"/>
+                <a16:creationId xmlns:a16="http://schemas.microsoft.com/office/drawing/2014/main" id="{A9FE5212-B8E9-96D0-05AC-02CA78F3F58E}"/>
               </a:ext>
             </a:extLst>
           </p:cNvPr>
@@ -765,7 +765,7 @@
           <p:cNvPr id="6" name="スライド番号プレースホルダー 5">
             <a:extLst>
               <a:ext uri="{FF2B5EF4-FFF2-40B4-BE49-F238E27FC236}">
-                <a16:creationId xmlns:a16="http://schemas.microsoft.com/office/drawing/2014/main" id="{C6E071E5-5237-B9FA-8A32-CEB22EFA1C25}"/>
+                <a16:creationId xmlns:a16="http://schemas.microsoft.com/office/drawing/2014/main" id="{9D27057E-8F0F-15B7-18EF-8E8CE68480C9}"/>
               </a:ext>
             </a:extLst>
           </p:cNvPr>
@@ -781,7 +781,7 @@
           <a:bodyPr/>
           <a:lstStyle/>
           <a:p>
-            <a:fld id="{C342AFD4-742E-43D6-9723-44C73474E714}" type="slidenum">
+            <a:fld id="{9DC27E15-2A5C-48BF-B85B-F7AE2C385561}" type="slidenum">
               <a:rPr kumimoji="1" lang="ja-JP" altLang="en-US" smtClean="0"/>
               <a:t>‹#›</a:t>
             </a:fld>
@@ -792,7 +792,7 @@
     </p:spTree>
     <p:extLst>
       <p:ext uri="{BB962C8B-B14F-4D97-AF65-F5344CB8AC3E}">
-        <p14:creationId xmlns:p14="http://schemas.microsoft.com/office/powerpoint/2010/main" val="2854876834"/>
+        <p14:creationId xmlns:p14="http://schemas.microsoft.com/office/powerpoint/2010/main" val="3299414194"/>
       </p:ext>
     </p:extLst>
   </p:cSld>
@@ -824,7 +824,7 @@
           <p:cNvPr id="2" name="タイトル 1">
             <a:extLst>
               <a:ext uri="{FF2B5EF4-FFF2-40B4-BE49-F238E27FC236}">
-                <a16:creationId xmlns:a16="http://schemas.microsoft.com/office/drawing/2014/main" id="{0978AA48-A9FB-72BA-889C-446AEEE6756E}"/>
+                <a16:creationId xmlns:a16="http://schemas.microsoft.com/office/drawing/2014/main" id="{4459A168-08E5-E44F-DBDA-C2808451BDA0}"/>
               </a:ext>
             </a:extLst>
           </p:cNvPr>
@@ -852,7 +852,7 @@
           <p:cNvPr id="3" name="コンテンツ プレースホルダー 2">
             <a:extLst>
               <a:ext uri="{FF2B5EF4-FFF2-40B4-BE49-F238E27FC236}">
-                <a16:creationId xmlns:a16="http://schemas.microsoft.com/office/drawing/2014/main" id="{6635C611-F65D-828C-2D70-F539C90CB2F5}"/>
+                <a16:creationId xmlns:a16="http://schemas.microsoft.com/office/drawing/2014/main" id="{DD7E9336-9E2A-E05B-4D00-B627BE65D445}"/>
               </a:ext>
             </a:extLst>
           </p:cNvPr>
@@ -941,7 +941,7 @@
           <p:cNvPr id="4" name="日付プレースホルダー 3">
             <a:extLst>
               <a:ext uri="{FF2B5EF4-FFF2-40B4-BE49-F238E27FC236}">
-                <a16:creationId xmlns:a16="http://schemas.microsoft.com/office/drawing/2014/main" id="{93856F12-76C4-21F2-6DE7-DF5427E88D31}"/>
+                <a16:creationId xmlns:a16="http://schemas.microsoft.com/office/drawing/2014/main" id="{E882E0D4-933C-9CB0-2750-AADA9D3FA6D6}"/>
               </a:ext>
             </a:extLst>
           </p:cNvPr>
@@ -957,7 +957,7 @@
           <a:bodyPr/>
           <a:lstStyle/>
           <a:p>
-            <a:fld id="{67DAE527-8467-40DE-95AF-A610E0AB2909}" type="datetimeFigureOut">
+            <a:fld id="{721A9336-96E6-46F3-BA68-05969BBC16EA}" type="datetimeFigureOut">
               <a:rPr kumimoji="1" lang="ja-JP" altLang="en-US" smtClean="0"/>
               <a:t>2026/7/30</a:t>
             </a:fld>
@@ -970,7 +970,7 @@
           <p:cNvPr id="5" name="フッター プレースホルダー 4">
             <a:extLst>
               <a:ext uri="{FF2B5EF4-FFF2-40B4-BE49-F238E27FC236}">
-                <a16:creationId xmlns:a16="http://schemas.microsoft.com/office/drawing/2014/main" id="{99A28531-748E-01A4-8E7B-4609F906545C}"/>
+                <a16:creationId xmlns:a16="http://schemas.microsoft.com/office/drawing/2014/main" id="{A4B5DFA0-BDFC-AE77-2AB3-AD5FCF4C4255}"/>
               </a:ext>
             </a:extLst>
           </p:cNvPr>
@@ -995,7 +995,7 @@
           <p:cNvPr id="6" name="スライド番号プレースホルダー 5">
             <a:extLst>
               <a:ext uri="{FF2B5EF4-FFF2-40B4-BE49-F238E27FC236}">
-                <a16:creationId xmlns:a16="http://schemas.microsoft.com/office/drawing/2014/main" id="{38EC5F36-FDE5-26DD-2A37-1A9B48F3A85F}"/>
+                <a16:creationId xmlns:a16="http://schemas.microsoft.com/office/drawing/2014/main" id="{05A8F7D6-E17E-7F74-395D-4F892BC0900E}"/>
               </a:ext>
             </a:extLst>
           </p:cNvPr>
@@ -1011,7 +1011,7 @@
           <a:bodyPr/>
           <a:lstStyle/>
           <a:p>
-            <a:fld id="{C342AFD4-742E-43D6-9723-44C73474E714}" type="slidenum">
+            <a:fld id="{9DC27E15-2A5C-48BF-B85B-F7AE2C385561}" type="slidenum">
               <a:rPr kumimoji="1" lang="ja-JP" altLang="en-US" smtClean="0"/>
               <a:t>‹#›</a:t>
             </a:fld>
@@ -1022,7 +1022,7 @@
     </p:spTree>
     <p:extLst>
       <p:ext uri="{BB962C8B-B14F-4D97-AF65-F5344CB8AC3E}">
-        <p14:creationId xmlns:p14="http://schemas.microsoft.com/office/powerpoint/2010/main" val="4149920149"/>
+        <p14:creationId xmlns:p14="http://schemas.microsoft.com/office/powerpoint/2010/main" val="1200395299"/>
       </p:ext>
     </p:extLst>
   </p:cSld>
@@ -1054,7 +1054,7 @@
           <p:cNvPr id="2" name="タイトル 1">
             <a:extLst>
               <a:ext uri="{FF2B5EF4-FFF2-40B4-BE49-F238E27FC236}">
-                <a16:creationId xmlns:a16="http://schemas.microsoft.com/office/drawing/2014/main" id="{EAF2D62E-E24B-A2AF-C010-7CF2E3351F07}"/>
+                <a16:creationId xmlns:a16="http://schemas.microsoft.com/office/drawing/2014/main" id="{48F05CB2-6F00-5A42-347B-40564109BE7A}"/>
               </a:ext>
             </a:extLst>
           </p:cNvPr>
@@ -1091,7 +1091,7 @@
           <p:cNvPr id="3" name="テキスト プレースホルダー 2">
             <a:extLst>
               <a:ext uri="{FF2B5EF4-FFF2-40B4-BE49-F238E27FC236}">
-                <a16:creationId xmlns:a16="http://schemas.microsoft.com/office/drawing/2014/main" id="{E8CADFA4-FFEC-287F-4DE0-356496AC2074}"/>
+                <a16:creationId xmlns:a16="http://schemas.microsoft.com/office/drawing/2014/main" id="{31CAE246-EDAE-7F3C-5409-59B7CBC05577}"/>
               </a:ext>
             </a:extLst>
           </p:cNvPr>
@@ -1216,7 +1216,7 @@
           <p:cNvPr id="4" name="日付プレースホルダー 3">
             <a:extLst>
               <a:ext uri="{FF2B5EF4-FFF2-40B4-BE49-F238E27FC236}">
-                <a16:creationId xmlns:a16="http://schemas.microsoft.com/office/drawing/2014/main" id="{A0669B71-38D7-C4E1-77F4-4E3C551C564F}"/>
+                <a16:creationId xmlns:a16="http://schemas.microsoft.com/office/drawing/2014/main" id="{94D75222-3E99-2BC5-B9C6-24D2F7A16E42}"/>
               </a:ext>
             </a:extLst>
           </p:cNvPr>
@@ -1232,7 +1232,7 @@
           <a:bodyPr/>
           <a:lstStyle/>
           <a:p>
-            <a:fld id="{67DAE527-8467-40DE-95AF-A610E0AB2909}" type="datetimeFigureOut">
+            <a:fld id="{721A9336-96E6-46F3-BA68-05969BBC16EA}" type="datetimeFigureOut">
               <a:rPr kumimoji="1" lang="ja-JP" altLang="en-US" smtClean="0"/>
               <a:t>2026/7/30</a:t>
             </a:fld>
@@ -1245,7 +1245,7 @@
           <p:cNvPr id="5" name="フッター プレースホルダー 4">
             <a:extLst>
               <a:ext uri="{FF2B5EF4-FFF2-40B4-BE49-F238E27FC236}">
-                <a16:creationId xmlns:a16="http://schemas.microsoft.com/office/drawing/2014/main" id="{0539316F-E51A-378E-D8AF-9C7B344753FE}"/>
+                <a16:creationId xmlns:a16="http://schemas.microsoft.com/office/drawing/2014/main" id="{7B769613-DCAB-DE91-3B10-C2AA6E78335D}"/>
               </a:ext>
             </a:extLst>
           </p:cNvPr>
@@ -1270,7 +1270,7 @@
           <p:cNvPr id="6" name="スライド番号プレースホルダー 5">
             <a:extLst>
               <a:ext uri="{FF2B5EF4-FFF2-40B4-BE49-F238E27FC236}">
-                <a16:creationId xmlns:a16="http://schemas.microsoft.com/office/drawing/2014/main" id="{F750CB69-4A9D-DCB7-C2F5-7C0D49CA7AF4}"/>
+                <a16:creationId xmlns:a16="http://schemas.microsoft.com/office/drawing/2014/main" id="{21990599-3135-6144-E6F3-4132B5263ED6}"/>
               </a:ext>
             </a:extLst>
           </p:cNvPr>
@@ -1286,7 +1286,7 @@
           <a:bodyPr/>
           <a:lstStyle/>
           <a:p>
-            <a:fld id="{C342AFD4-742E-43D6-9723-44C73474E714}" type="slidenum">
+            <a:fld id="{9DC27E15-2A5C-48BF-B85B-F7AE2C385561}" type="slidenum">
               <a:rPr kumimoji="1" lang="ja-JP" altLang="en-US" smtClean="0"/>
               <a:t>‹#›</a:t>
             </a:fld>
@@ -1297,7 +1297,7 @@
     </p:spTree>
     <p:extLst>
       <p:ext uri="{BB962C8B-B14F-4D97-AF65-F5344CB8AC3E}">
-        <p14:creationId xmlns:p14="http://schemas.microsoft.com/office/powerpoint/2010/main" val="3373322832"/>
+        <p14:creationId xmlns:p14="http://schemas.microsoft.com/office/powerpoint/2010/main" val="3356020717"/>
       </p:ext>
     </p:extLst>
   </p:cSld>
@@ -1329,7 +1329,7 @@
           <p:cNvPr id="2" name="タイトル 1">
             <a:extLst>
               <a:ext uri="{FF2B5EF4-FFF2-40B4-BE49-F238E27FC236}">
-                <a16:creationId xmlns:a16="http://schemas.microsoft.com/office/drawing/2014/main" id="{B84B0C36-F2B9-3CE4-0ABD-B6CC39BBCDDE}"/>
+                <a16:creationId xmlns:a16="http://schemas.microsoft.com/office/drawing/2014/main" id="{AD9EB681-F656-CEE1-A2F6-63D2B924C02D}"/>
               </a:ext>
             </a:extLst>
           </p:cNvPr>
@@ -1357,7 +1357,7 @@
           <p:cNvPr id="3" name="コンテンツ プレースホルダー 2">
             <a:extLst>
               <a:ext uri="{FF2B5EF4-FFF2-40B4-BE49-F238E27FC236}">
-                <a16:creationId xmlns:a16="http://schemas.microsoft.com/office/drawing/2014/main" id="{DC9465E3-5A48-9D33-2A5F-F5DAD975E191}"/>
+                <a16:creationId xmlns:a16="http://schemas.microsoft.com/office/drawing/2014/main" id="{6F1B5A88-E038-14A7-DB7B-2D37E97AF321}"/>
               </a:ext>
             </a:extLst>
           </p:cNvPr>
@@ -1451,7 +1451,7 @@
           <p:cNvPr id="4" name="コンテンツ プレースホルダー 3">
             <a:extLst>
               <a:ext uri="{FF2B5EF4-FFF2-40B4-BE49-F238E27FC236}">
-                <a16:creationId xmlns:a16="http://schemas.microsoft.com/office/drawing/2014/main" id="{BAFC1601-AA5A-5D22-BA9B-234284D1D3B1}"/>
+                <a16:creationId xmlns:a16="http://schemas.microsoft.com/office/drawing/2014/main" id="{2B4730A7-156C-E361-D8E2-A031A5A5CC1A}"/>
               </a:ext>
             </a:extLst>
           </p:cNvPr>
@@ -1545,7 +1545,7 @@
           <p:cNvPr id="5" name="日付プレースホルダー 4">
             <a:extLst>
               <a:ext uri="{FF2B5EF4-FFF2-40B4-BE49-F238E27FC236}">
-                <a16:creationId xmlns:a16="http://schemas.microsoft.com/office/drawing/2014/main" id="{8F454ED8-5B11-BF7C-744C-6BEB3BB66FEC}"/>
+                <a16:creationId xmlns:a16="http://schemas.microsoft.com/office/drawing/2014/main" id="{5BFCF270-4456-30A8-A535-2BFCCB4774A2}"/>
               </a:ext>
             </a:extLst>
           </p:cNvPr>
@@ -1561,7 +1561,7 @@
           <a:bodyPr/>
           <a:lstStyle/>
           <a:p>
-            <a:fld id="{67DAE527-8467-40DE-95AF-A610E0AB2909}" type="datetimeFigureOut">
+            <a:fld id="{721A9336-96E6-46F3-BA68-05969BBC16EA}" type="datetimeFigureOut">
               <a:rPr kumimoji="1" lang="ja-JP" altLang="en-US" smtClean="0"/>
               <a:t>2026/7/30</a:t>
             </a:fld>
@@ -1574,7 +1574,7 @@
           <p:cNvPr id="6" name="フッター プレースホルダー 5">
             <a:extLst>
               <a:ext uri="{FF2B5EF4-FFF2-40B4-BE49-F238E27FC236}">
-                <a16:creationId xmlns:a16="http://schemas.microsoft.com/office/drawing/2014/main" id="{E4BC7D66-4B52-1682-0478-29B1A603CB7D}"/>
+                <a16:creationId xmlns:a16="http://schemas.microsoft.com/office/drawing/2014/main" id="{B559B684-569F-0CAB-960B-A790F60298AD}"/>
               </a:ext>
             </a:extLst>
           </p:cNvPr>
@@ -1599,7 +1599,7 @@
           <p:cNvPr id="7" name="スライド番号プレースホルダー 6">
             <a:extLst>
               <a:ext uri="{FF2B5EF4-FFF2-40B4-BE49-F238E27FC236}">
-                <a16:creationId xmlns:a16="http://schemas.microsoft.com/office/drawing/2014/main" id="{BC3E3CB7-0B10-FD5D-C086-46373D665F89}"/>
+                <a16:creationId xmlns:a16="http://schemas.microsoft.com/office/drawing/2014/main" id="{898D4E0F-7CDF-1706-8718-5DE320061763}"/>
               </a:ext>
             </a:extLst>
           </p:cNvPr>
@@ -1615,7 +1615,7 @@
           <a:bodyPr/>
           <a:lstStyle/>
           <a:p>
-            <a:fld id="{C342AFD4-742E-43D6-9723-44C73474E714}" type="slidenum">
+            <a:fld id="{9DC27E15-2A5C-48BF-B85B-F7AE2C385561}" type="slidenum">
               <a:rPr kumimoji="1" lang="ja-JP" altLang="en-US" smtClean="0"/>
               <a:t>‹#›</a:t>
             </a:fld>
@@ -1626,7 +1626,7 @@
     </p:spTree>
     <p:extLst>
       <p:ext uri="{BB962C8B-B14F-4D97-AF65-F5344CB8AC3E}">
-        <p14:creationId xmlns:p14="http://schemas.microsoft.com/office/powerpoint/2010/main" val="1942417318"/>
+        <p14:creationId xmlns:p14="http://schemas.microsoft.com/office/powerpoint/2010/main" val="606842088"/>
       </p:ext>
     </p:extLst>
   </p:cSld>
@@ -1658,7 +1658,7 @@
           <p:cNvPr id="2" name="タイトル 1">
             <a:extLst>
               <a:ext uri="{FF2B5EF4-FFF2-40B4-BE49-F238E27FC236}">
-                <a16:creationId xmlns:a16="http://schemas.microsoft.com/office/drawing/2014/main" id="{29FC2813-1FCA-7E96-C664-8FDF6CB50AE4}"/>
+                <a16:creationId xmlns:a16="http://schemas.microsoft.com/office/drawing/2014/main" id="{1279C3AC-880C-1E9A-74A9-3C9C6D1D2130}"/>
               </a:ext>
             </a:extLst>
           </p:cNvPr>
@@ -1691,7 +1691,7 @@
           <p:cNvPr id="3" name="テキスト プレースホルダー 2">
             <a:extLst>
               <a:ext uri="{FF2B5EF4-FFF2-40B4-BE49-F238E27FC236}">
-                <a16:creationId xmlns:a16="http://schemas.microsoft.com/office/drawing/2014/main" id="{EFB9F9B3-2AE8-7E09-4805-45F5989DC48E}"/>
+                <a16:creationId xmlns:a16="http://schemas.microsoft.com/office/drawing/2014/main" id="{D8DB655C-35C1-E906-35B6-1C4F9FE783FA}"/>
               </a:ext>
             </a:extLst>
           </p:cNvPr>
@@ -1762,7 +1762,7 @@
           <p:cNvPr id="4" name="コンテンツ プレースホルダー 3">
             <a:extLst>
               <a:ext uri="{FF2B5EF4-FFF2-40B4-BE49-F238E27FC236}">
-                <a16:creationId xmlns:a16="http://schemas.microsoft.com/office/drawing/2014/main" id="{48262D35-6808-FCE7-074B-40DFC111AD5F}"/>
+                <a16:creationId xmlns:a16="http://schemas.microsoft.com/office/drawing/2014/main" id="{BB594071-7ED8-C2D6-8DB8-F993C96207AF}"/>
               </a:ext>
             </a:extLst>
           </p:cNvPr>
@@ -1856,7 +1856,7 @@
           <p:cNvPr id="5" name="テキスト プレースホルダー 4">
             <a:extLst>
               <a:ext uri="{FF2B5EF4-FFF2-40B4-BE49-F238E27FC236}">
-                <a16:creationId xmlns:a16="http://schemas.microsoft.com/office/drawing/2014/main" id="{6A0CFC87-A1F0-D195-3994-5C54E5B2E79C}"/>
+                <a16:creationId xmlns:a16="http://schemas.microsoft.com/office/drawing/2014/main" id="{ECAB55D4-DCDC-419C-0BE6-3BEB284C94C8}"/>
               </a:ext>
             </a:extLst>
           </p:cNvPr>
@@ -1927,7 +1927,7 @@
           <p:cNvPr id="6" name="コンテンツ プレースホルダー 5">
             <a:extLst>
               <a:ext uri="{FF2B5EF4-FFF2-40B4-BE49-F238E27FC236}">
-                <a16:creationId xmlns:a16="http://schemas.microsoft.com/office/drawing/2014/main" id="{5FCC687B-8180-A1F7-AF59-06A57E643FF5}"/>
+                <a16:creationId xmlns:a16="http://schemas.microsoft.com/office/drawing/2014/main" id="{7A98DCBE-D1EC-E186-F757-2E031953B86E}"/>
               </a:ext>
             </a:extLst>
           </p:cNvPr>
@@ -2021,7 +2021,7 @@
           <p:cNvPr id="7" name="日付プレースホルダー 6">
             <a:extLst>
               <a:ext uri="{FF2B5EF4-FFF2-40B4-BE49-F238E27FC236}">
-                <a16:creationId xmlns:a16="http://schemas.microsoft.com/office/drawing/2014/main" id="{77422978-1616-3DDA-F250-49AB076351F1}"/>
+                <a16:creationId xmlns:a16="http://schemas.microsoft.com/office/drawing/2014/main" id="{AF1A00C8-373A-D342-10EA-A86DEAD6EF26}"/>
               </a:ext>
             </a:extLst>
           </p:cNvPr>
@@ -2037,7 +2037,7 @@
           <a:bodyPr/>
           <a:lstStyle/>
           <a:p>
-            <a:fld id="{67DAE527-8467-40DE-95AF-A610E0AB2909}" type="datetimeFigureOut">
+            <a:fld id="{721A9336-96E6-46F3-BA68-05969BBC16EA}" type="datetimeFigureOut">
               <a:rPr kumimoji="1" lang="ja-JP" altLang="en-US" smtClean="0"/>
               <a:t>2026/7/30</a:t>
             </a:fld>
@@ -2050,7 +2050,7 @@
           <p:cNvPr id="8" name="フッター プレースホルダー 7">
             <a:extLst>
               <a:ext uri="{FF2B5EF4-FFF2-40B4-BE49-F238E27FC236}">
-                <a16:creationId xmlns:a16="http://schemas.microsoft.com/office/drawing/2014/main" id="{13231ED6-B767-F2BC-5825-FFA1119BA2DA}"/>
+                <a16:creationId xmlns:a16="http://schemas.microsoft.com/office/drawing/2014/main" id="{805402CE-E0D0-373A-1AE1-E36A5308D7D0}"/>
               </a:ext>
             </a:extLst>
           </p:cNvPr>
@@ -2075,7 +2075,7 @@
           <p:cNvPr id="9" name="スライド番号プレースホルダー 8">
             <a:extLst>
               <a:ext uri="{FF2B5EF4-FFF2-40B4-BE49-F238E27FC236}">
-                <a16:creationId xmlns:a16="http://schemas.microsoft.com/office/drawing/2014/main" id="{AA51EC22-BEA2-8A20-8542-6A3A2F902D03}"/>
+                <a16:creationId xmlns:a16="http://schemas.microsoft.com/office/drawing/2014/main" id="{63F07EAD-D39E-0A4C-BD9A-432124861A44}"/>
               </a:ext>
             </a:extLst>
           </p:cNvPr>
@@ -2091,7 +2091,7 @@
           <a:bodyPr/>
           <a:lstStyle/>
           <a:p>
-            <a:fld id="{C342AFD4-742E-43D6-9723-44C73474E714}" type="slidenum">
+            <a:fld id="{9DC27E15-2A5C-48BF-B85B-F7AE2C385561}" type="slidenum">
               <a:rPr kumimoji="1" lang="ja-JP" altLang="en-US" smtClean="0"/>
               <a:t>‹#›</a:t>
             </a:fld>
@@ -2102,7 +2102,7 @@
     </p:spTree>
     <p:extLst>
       <p:ext uri="{BB962C8B-B14F-4D97-AF65-F5344CB8AC3E}">
-        <p14:creationId xmlns:p14="http://schemas.microsoft.com/office/powerpoint/2010/main" val="3061793118"/>
+        <p14:creationId xmlns:p14="http://schemas.microsoft.com/office/powerpoint/2010/main" val="1850213024"/>
       </p:ext>
     </p:extLst>
   </p:cSld>
@@ -2134,7 +2134,7 @@
           <p:cNvPr id="2" name="タイトル 1">
             <a:extLst>
               <a:ext uri="{FF2B5EF4-FFF2-40B4-BE49-F238E27FC236}">
-                <a16:creationId xmlns:a16="http://schemas.microsoft.com/office/drawing/2014/main" id="{536B9A73-9A30-B89E-FBF9-831821EEED71}"/>
+                <a16:creationId xmlns:a16="http://schemas.microsoft.com/office/drawing/2014/main" id="{58B80F51-AF3C-C80B-0A9A-1342C9D7FF13}"/>
               </a:ext>
             </a:extLst>
           </p:cNvPr>
@@ -2162,7 +2162,7 @@
           <p:cNvPr id="3" name="日付プレースホルダー 2">
             <a:extLst>
               <a:ext uri="{FF2B5EF4-FFF2-40B4-BE49-F238E27FC236}">
-                <a16:creationId xmlns:a16="http://schemas.microsoft.com/office/drawing/2014/main" id="{A97D9486-CB71-9906-D683-6B68D24330EF}"/>
+                <a16:creationId xmlns:a16="http://schemas.microsoft.com/office/drawing/2014/main" id="{02880751-E52A-E3A1-B0F8-14F77E9D2594}"/>
               </a:ext>
             </a:extLst>
           </p:cNvPr>
@@ -2178,7 +2178,7 @@
           <a:bodyPr/>
           <a:lstStyle/>
           <a:p>
-            <a:fld id="{67DAE527-8467-40DE-95AF-A610E0AB2909}" type="datetimeFigureOut">
+            <a:fld id="{721A9336-96E6-46F3-BA68-05969BBC16EA}" type="datetimeFigureOut">
               <a:rPr kumimoji="1" lang="ja-JP" altLang="en-US" smtClean="0"/>
               <a:t>2026/7/30</a:t>
             </a:fld>
@@ -2191,7 +2191,7 @@
           <p:cNvPr id="4" name="フッター プレースホルダー 3">
             <a:extLst>
               <a:ext uri="{FF2B5EF4-FFF2-40B4-BE49-F238E27FC236}">
-                <a16:creationId xmlns:a16="http://schemas.microsoft.com/office/drawing/2014/main" id="{D4C5B60C-AE76-D523-D084-9792599304F4}"/>
+                <a16:creationId xmlns:a16="http://schemas.microsoft.com/office/drawing/2014/main" id="{F1988118-5624-B7D9-5964-27C19CB00641}"/>
               </a:ext>
             </a:extLst>
           </p:cNvPr>
@@ -2216,7 +2216,7 @@
           <p:cNvPr id="5" name="スライド番号プレースホルダー 4">
             <a:extLst>
               <a:ext uri="{FF2B5EF4-FFF2-40B4-BE49-F238E27FC236}">
-                <a16:creationId xmlns:a16="http://schemas.microsoft.com/office/drawing/2014/main" id="{2C4FE5E8-A3CC-594E-75C5-5104B3F038EC}"/>
+                <a16:creationId xmlns:a16="http://schemas.microsoft.com/office/drawing/2014/main" id="{CCF8EB43-E880-EE1C-4513-50794B4618E4}"/>
               </a:ext>
             </a:extLst>
           </p:cNvPr>
@@ -2232,7 +2232,7 @@
           <a:bodyPr/>
           <a:lstStyle/>
           <a:p>
-            <a:fld id="{C342AFD4-742E-43D6-9723-44C73474E714}" type="slidenum">
+            <a:fld id="{9DC27E15-2A5C-48BF-B85B-F7AE2C385561}" type="slidenum">
               <a:rPr kumimoji="1" lang="ja-JP" altLang="en-US" smtClean="0"/>
               <a:t>‹#›</a:t>
             </a:fld>
@@ -2243,7 +2243,7 @@
     </p:spTree>
     <p:extLst>
       <p:ext uri="{BB962C8B-B14F-4D97-AF65-F5344CB8AC3E}">
-        <p14:creationId xmlns:p14="http://schemas.microsoft.com/office/powerpoint/2010/main" val="2293497214"/>
+        <p14:creationId xmlns:p14="http://schemas.microsoft.com/office/powerpoint/2010/main" val="2635148908"/>
       </p:ext>
     </p:extLst>
   </p:cSld>
@@ -2275,7 +2275,7 @@
           <p:cNvPr id="2" name="日付プレースホルダー 1">
             <a:extLst>
               <a:ext uri="{FF2B5EF4-FFF2-40B4-BE49-F238E27FC236}">
-                <a16:creationId xmlns:a16="http://schemas.microsoft.com/office/drawing/2014/main" id="{BC460B2A-2CB5-AE9C-BE77-0B29BAAC2BC1}"/>
+                <a16:creationId xmlns:a16="http://schemas.microsoft.com/office/drawing/2014/main" id="{8076429F-1A98-2C50-5B87-5111866A50C7}"/>
               </a:ext>
             </a:extLst>
           </p:cNvPr>
@@ -2291,7 +2291,7 @@
           <a:bodyPr/>
           <a:lstStyle/>
           <a:p>
-            <a:fld id="{67DAE527-8467-40DE-95AF-A610E0AB2909}" type="datetimeFigureOut">
+            <a:fld id="{721A9336-96E6-46F3-BA68-05969BBC16EA}" type="datetimeFigureOut">
               <a:rPr kumimoji="1" lang="ja-JP" altLang="en-US" smtClean="0"/>
               <a:t>2026/7/30</a:t>
             </a:fld>
@@ -2304,7 +2304,7 @@
           <p:cNvPr id="3" name="フッター プレースホルダー 2">
             <a:extLst>
               <a:ext uri="{FF2B5EF4-FFF2-40B4-BE49-F238E27FC236}">
-                <a16:creationId xmlns:a16="http://schemas.microsoft.com/office/drawing/2014/main" id="{F3207DC8-DE8E-BD50-8E29-1558B9264307}"/>
+                <a16:creationId xmlns:a16="http://schemas.microsoft.com/office/drawing/2014/main" id="{63133BA2-C995-CB7E-D2E0-FE7142DB0D57}"/>
               </a:ext>
             </a:extLst>
           </p:cNvPr>
@@ -2329,7 +2329,7 @@
           <p:cNvPr id="4" name="スライド番号プレースホルダー 3">
             <a:extLst>
               <a:ext uri="{FF2B5EF4-FFF2-40B4-BE49-F238E27FC236}">
-                <a16:creationId xmlns:a16="http://schemas.microsoft.com/office/drawing/2014/main" id="{FA366562-3B44-5FC3-4A10-17E4A8526E1B}"/>
+                <a16:creationId xmlns:a16="http://schemas.microsoft.com/office/drawing/2014/main" id="{41F60D38-C3A3-99B9-6FA9-068944030DE6}"/>
               </a:ext>
             </a:extLst>
           </p:cNvPr>
@@ -2345,7 +2345,7 @@
           <a:bodyPr/>
           <a:lstStyle/>
           <a:p>
-            <a:fld id="{C342AFD4-742E-43D6-9723-44C73474E714}" type="slidenum">
+            <a:fld id="{9DC27E15-2A5C-48BF-B85B-F7AE2C385561}" type="slidenum">
               <a:rPr kumimoji="1" lang="ja-JP" altLang="en-US" smtClean="0"/>
               <a:t>‹#›</a:t>
             </a:fld>
@@ -2356,7 +2356,7 @@
     </p:spTree>
     <p:extLst>
       <p:ext uri="{BB962C8B-B14F-4D97-AF65-F5344CB8AC3E}">
-        <p14:creationId xmlns:p14="http://schemas.microsoft.com/office/powerpoint/2010/main" val="978255066"/>
+        <p14:creationId xmlns:p14="http://schemas.microsoft.com/office/powerpoint/2010/main" val="2849465220"/>
       </p:ext>
     </p:extLst>
   </p:cSld>
@@ -2388,7 +2388,7 @@
           <p:cNvPr id="2" name="タイトル 1">
             <a:extLst>
               <a:ext uri="{FF2B5EF4-FFF2-40B4-BE49-F238E27FC236}">
-                <a16:creationId xmlns:a16="http://schemas.microsoft.com/office/drawing/2014/main" id="{C351263F-F6A3-531D-82C6-81D78E6D0904}"/>
+                <a16:creationId xmlns:a16="http://schemas.microsoft.com/office/drawing/2014/main" id="{AF246325-FEA6-2173-7ADC-4B4D34479AB9}"/>
               </a:ext>
             </a:extLst>
           </p:cNvPr>
@@ -2425,7 +2425,7 @@
           <p:cNvPr id="3" name="コンテンツ プレースホルダー 2">
             <a:extLst>
               <a:ext uri="{FF2B5EF4-FFF2-40B4-BE49-F238E27FC236}">
-                <a16:creationId xmlns:a16="http://schemas.microsoft.com/office/drawing/2014/main" id="{01748487-35C5-92AB-159E-89CE158A850A}"/>
+                <a16:creationId xmlns:a16="http://schemas.microsoft.com/office/drawing/2014/main" id="{17BA1D50-9648-D9ED-60D7-2A376A64E7F5}"/>
               </a:ext>
             </a:extLst>
           </p:cNvPr>
@@ -2547,7 +2547,7 @@
           <p:cNvPr id="4" name="テキスト プレースホルダー 3">
             <a:extLst>
               <a:ext uri="{FF2B5EF4-FFF2-40B4-BE49-F238E27FC236}">
-                <a16:creationId xmlns:a16="http://schemas.microsoft.com/office/drawing/2014/main" id="{9A230C79-3167-0BD7-A313-74E56FB3A8B4}"/>
+                <a16:creationId xmlns:a16="http://schemas.microsoft.com/office/drawing/2014/main" id="{50D1F563-455D-5CF2-82C0-332F80632EDD}"/>
               </a:ext>
             </a:extLst>
           </p:cNvPr>
@@ -2618,7 +2618,7 @@
           <p:cNvPr id="5" name="日付プレースホルダー 4">
             <a:extLst>
               <a:ext uri="{FF2B5EF4-FFF2-40B4-BE49-F238E27FC236}">
-                <a16:creationId xmlns:a16="http://schemas.microsoft.com/office/drawing/2014/main" id="{5A68B840-4EBD-731C-D3F8-C6D5512B7C44}"/>
+                <a16:creationId xmlns:a16="http://schemas.microsoft.com/office/drawing/2014/main" id="{92DAEF1C-A2C5-0D74-68B4-89E963F42589}"/>
               </a:ext>
             </a:extLst>
           </p:cNvPr>
@@ -2634,7 +2634,7 @@
           <a:bodyPr/>
           <a:lstStyle/>
           <a:p>
-            <a:fld id="{67DAE527-8467-40DE-95AF-A610E0AB2909}" type="datetimeFigureOut">
+            <a:fld id="{721A9336-96E6-46F3-BA68-05969BBC16EA}" type="datetimeFigureOut">
               <a:rPr kumimoji="1" lang="ja-JP" altLang="en-US" smtClean="0"/>
               <a:t>2026/7/30</a:t>
             </a:fld>
@@ -2647,7 +2647,7 @@
           <p:cNvPr id="6" name="フッター プレースホルダー 5">
             <a:extLst>
               <a:ext uri="{FF2B5EF4-FFF2-40B4-BE49-F238E27FC236}">
-                <a16:creationId xmlns:a16="http://schemas.microsoft.com/office/drawing/2014/main" id="{1FF34941-ACCB-9D07-6B73-31EC59FFD946}"/>
+                <a16:creationId xmlns:a16="http://schemas.microsoft.com/office/drawing/2014/main" id="{69D372CF-B466-1741-D410-24D6653713E1}"/>
               </a:ext>
             </a:extLst>
           </p:cNvPr>
@@ -2672,7 +2672,7 @@
           <p:cNvPr id="7" name="スライド番号プレースホルダー 6">
             <a:extLst>
               <a:ext uri="{FF2B5EF4-FFF2-40B4-BE49-F238E27FC236}">
-                <a16:creationId xmlns:a16="http://schemas.microsoft.com/office/drawing/2014/main" id="{E5A84CCE-18A0-DA0B-C691-ECA30B1AB908}"/>
+                <a16:creationId xmlns:a16="http://schemas.microsoft.com/office/drawing/2014/main" id="{BC9B86CA-0BA8-A48B-B20A-DFFD19C3E42B}"/>
               </a:ext>
             </a:extLst>
           </p:cNvPr>
@@ -2688,7 +2688,7 @@
           <a:bodyPr/>
           <a:lstStyle/>
           <a:p>
-            <a:fld id="{C342AFD4-742E-43D6-9723-44C73474E714}" type="slidenum">
+            <a:fld id="{9DC27E15-2A5C-48BF-B85B-F7AE2C385561}" type="slidenum">
               <a:rPr kumimoji="1" lang="ja-JP" altLang="en-US" smtClean="0"/>
               <a:t>‹#›</a:t>
             </a:fld>
@@ -2699,7 +2699,7 @@
     </p:spTree>
     <p:extLst>
       <p:ext uri="{BB962C8B-B14F-4D97-AF65-F5344CB8AC3E}">
-        <p14:creationId xmlns:p14="http://schemas.microsoft.com/office/powerpoint/2010/main" val="2191361662"/>
+        <p14:creationId xmlns:p14="http://schemas.microsoft.com/office/powerpoint/2010/main" val="2586590498"/>
       </p:ext>
     </p:extLst>
   </p:cSld>
@@ -2731,7 +2731,7 @@
           <p:cNvPr id="2" name="タイトル 1">
             <a:extLst>
               <a:ext uri="{FF2B5EF4-FFF2-40B4-BE49-F238E27FC236}">
-                <a16:creationId xmlns:a16="http://schemas.microsoft.com/office/drawing/2014/main" id="{05F47A94-E578-816B-6E1D-6CAE51C28A92}"/>
+                <a16:creationId xmlns:a16="http://schemas.microsoft.com/office/drawing/2014/main" id="{81CF176C-66A1-D632-0C61-A0EDF34EEF40}"/>
               </a:ext>
             </a:extLst>
           </p:cNvPr>
@@ -2768,7 +2768,7 @@
           <p:cNvPr id="3" name="図プレースホルダー 2">
             <a:extLst>
               <a:ext uri="{FF2B5EF4-FFF2-40B4-BE49-F238E27FC236}">
-                <a16:creationId xmlns:a16="http://schemas.microsoft.com/office/drawing/2014/main" id="{086A7822-BBC5-98AC-5F44-481014372D02}"/>
+                <a16:creationId xmlns:a16="http://schemas.microsoft.com/office/drawing/2014/main" id="{CB83FDC5-68F5-6A04-F1A6-7FC911351135}"/>
               </a:ext>
             </a:extLst>
           </p:cNvPr>
@@ -2835,7 +2835,7 @@
           <p:cNvPr id="4" name="テキスト プレースホルダー 3">
             <a:extLst>
               <a:ext uri="{FF2B5EF4-FFF2-40B4-BE49-F238E27FC236}">
-                <a16:creationId xmlns:a16="http://schemas.microsoft.com/office/drawing/2014/main" id="{59005D72-6481-0907-512A-12D5E7F36FEF}"/>
+                <a16:creationId xmlns:a16="http://schemas.microsoft.com/office/drawing/2014/main" id="{0568F8F2-9D46-DA08-4364-9C198192FDE8}"/>
               </a:ext>
             </a:extLst>
           </p:cNvPr>
@@ -2906,7 +2906,7 @@
           <p:cNvPr id="5" name="日付プレースホルダー 4">
             <a:extLst>
               <a:ext uri="{FF2B5EF4-FFF2-40B4-BE49-F238E27FC236}">
-                <a16:creationId xmlns:a16="http://schemas.microsoft.com/office/drawing/2014/main" id="{3B4B20F5-8EE7-16D7-BA45-0F3022662BF7}"/>
+                <a16:creationId xmlns:a16="http://schemas.microsoft.com/office/drawing/2014/main" id="{0446ADD7-59A6-E554-DA8E-14158B6B0751}"/>
               </a:ext>
             </a:extLst>
           </p:cNvPr>
@@ -2922,7 +2922,7 @@
           <a:bodyPr/>
           <a:lstStyle/>
           <a:p>
-            <a:fld id="{67DAE527-8467-40DE-95AF-A610E0AB2909}" type="datetimeFigureOut">
+            <a:fld id="{721A9336-96E6-46F3-BA68-05969BBC16EA}" type="datetimeFigureOut">
               <a:rPr kumimoji="1" lang="ja-JP" altLang="en-US" smtClean="0"/>
               <a:t>2026/7/30</a:t>
             </a:fld>
@@ -2935,7 +2935,7 @@
           <p:cNvPr id="6" name="フッター プレースホルダー 5">
             <a:extLst>
               <a:ext uri="{FF2B5EF4-FFF2-40B4-BE49-F238E27FC236}">
-                <a16:creationId xmlns:a16="http://schemas.microsoft.com/office/drawing/2014/main" id="{82121DDD-6E6A-278A-69DD-51E6CBD47E9A}"/>
+                <a16:creationId xmlns:a16="http://schemas.microsoft.com/office/drawing/2014/main" id="{C4D365FD-5B60-2AE8-91D3-2F08C7D5AA26}"/>
               </a:ext>
             </a:extLst>
           </p:cNvPr>
@@ -2960,7 +2960,7 @@
           <p:cNvPr id="7" name="スライド番号プレースホルダー 6">
             <a:extLst>
               <a:ext uri="{FF2B5EF4-FFF2-40B4-BE49-F238E27FC236}">
-                <a16:creationId xmlns:a16="http://schemas.microsoft.com/office/drawing/2014/main" id="{24009869-9C55-9C60-2E40-76BFA83EF6F0}"/>
+                <a16:creationId xmlns:a16="http://schemas.microsoft.com/office/drawing/2014/main" id="{0C6B4C02-2DA0-D76C-BF12-B88F728961DF}"/>
               </a:ext>
             </a:extLst>
           </p:cNvPr>
@@ -2976,7 +2976,7 @@
           <a:bodyPr/>
           <a:lstStyle/>
           <a:p>
-            <a:fld id="{C342AFD4-742E-43D6-9723-44C73474E714}" type="slidenum">
+            <a:fld id="{9DC27E15-2A5C-48BF-B85B-F7AE2C385561}" type="slidenum">
               <a:rPr kumimoji="1" lang="ja-JP" altLang="en-US" smtClean="0"/>
               <a:t>‹#›</a:t>
             </a:fld>
@@ -2987,7 +2987,7 @@
     </p:spTree>
     <p:extLst>
       <p:ext uri="{BB962C8B-B14F-4D97-AF65-F5344CB8AC3E}">
-        <p14:creationId xmlns:p14="http://schemas.microsoft.com/office/powerpoint/2010/main" val="1594196944"/>
+        <p14:creationId xmlns:p14="http://schemas.microsoft.com/office/powerpoint/2010/main" val="1686511006"/>
       </p:ext>
     </p:extLst>
   </p:cSld>
@@ -3024,7 +3024,7 @@
           <p:cNvPr id="2" name="タイトル プレースホルダー 1">
             <a:extLst>
               <a:ext uri="{FF2B5EF4-FFF2-40B4-BE49-F238E27FC236}">
-                <a16:creationId xmlns:a16="http://schemas.microsoft.com/office/drawing/2014/main" id="{17E4D5CA-4910-5334-1EAA-8FCC01EAB4C8}"/>
+                <a16:creationId xmlns:a16="http://schemas.microsoft.com/office/drawing/2014/main" id="{9ACB8B26-AE6A-6E1A-1D62-997FFAB47949}"/>
               </a:ext>
             </a:extLst>
           </p:cNvPr>
@@ -3062,7 +3062,7 @@
           <p:cNvPr id="3" name="テキスト プレースホルダー 2">
             <a:extLst>
               <a:ext uri="{FF2B5EF4-FFF2-40B4-BE49-F238E27FC236}">
-                <a16:creationId xmlns:a16="http://schemas.microsoft.com/office/drawing/2014/main" id="{83E393DE-E000-14F3-F433-2133A3480E72}"/>
+                <a16:creationId xmlns:a16="http://schemas.microsoft.com/office/drawing/2014/main" id="{17AAA68F-06EB-4CC1-52FC-EAFA38F95ADC}"/>
               </a:ext>
             </a:extLst>
           </p:cNvPr>
@@ -3161,7 +3161,7 @@
           <p:cNvPr id="4" name="日付プレースホルダー 3">
             <a:extLst>
               <a:ext uri="{FF2B5EF4-FFF2-40B4-BE49-F238E27FC236}">
-                <a16:creationId xmlns:a16="http://schemas.microsoft.com/office/drawing/2014/main" id="{0B7CA4AB-3958-E3B5-BE47-B3DA4FDF4B99}"/>
+                <a16:creationId xmlns:a16="http://schemas.microsoft.com/office/drawing/2014/main" id="{4ED6F44D-3453-F6BE-3C49-B4FF91D35C24}"/>
               </a:ext>
             </a:extLst>
           </p:cNvPr>
@@ -3195,7 +3195,7 @@
             </a:lvl1pPr>
           </a:lstStyle>
           <a:p>
-            <a:fld id="{67DAE527-8467-40DE-95AF-A610E0AB2909}" type="datetimeFigureOut">
+            <a:fld id="{721A9336-96E6-46F3-BA68-05969BBC16EA}" type="datetimeFigureOut">
               <a:rPr kumimoji="1" lang="ja-JP" altLang="en-US" smtClean="0"/>
               <a:t>2026/7/30</a:t>
             </a:fld>
@@ -3208,7 +3208,7 @@
           <p:cNvPr id="5" name="フッター プレースホルダー 4">
             <a:extLst>
               <a:ext uri="{FF2B5EF4-FFF2-40B4-BE49-F238E27FC236}">
-                <a16:creationId xmlns:a16="http://schemas.microsoft.com/office/drawing/2014/main" id="{65F39EA3-4308-1BB4-BA02-F998748755B9}"/>
+                <a16:creationId xmlns:a16="http://schemas.microsoft.com/office/drawing/2014/main" id="{2DF64411-1E42-6ACC-1AE8-64AEB56C6EDD}"/>
               </a:ext>
             </a:extLst>
           </p:cNvPr>
@@ -3251,7 +3251,7 @@
           <p:cNvPr id="6" name="スライド番号プレースホルダー 5">
             <a:extLst>
               <a:ext uri="{FF2B5EF4-FFF2-40B4-BE49-F238E27FC236}">
-                <a16:creationId xmlns:a16="http://schemas.microsoft.com/office/drawing/2014/main" id="{CBFE8998-D001-4C6E-09D1-7FA6938AB30A}"/>
+                <a16:creationId xmlns:a16="http://schemas.microsoft.com/office/drawing/2014/main" id="{F2DC02E2-C8DB-86C1-5BDC-77640FD70EA0}"/>
               </a:ext>
             </a:extLst>
           </p:cNvPr>
@@ -3285,7 +3285,7 @@
             </a:lvl1pPr>
           </a:lstStyle>
           <a:p>
-            <a:fld id="{C342AFD4-742E-43D6-9723-44C73474E714}" type="slidenum">
+            <a:fld id="{9DC27E15-2A5C-48BF-B85B-F7AE2C385561}" type="slidenum">
               <a:rPr kumimoji="1" lang="ja-JP" altLang="en-US" smtClean="0"/>
               <a:t>‹#›</a:t>
             </a:fld>
@@ -3296,7 +3296,7 @@
     </p:spTree>
     <p:extLst>
       <p:ext uri="{BB962C8B-B14F-4D97-AF65-F5344CB8AC3E}">
-        <p14:creationId xmlns:p14="http://schemas.microsoft.com/office/powerpoint/2010/main" val="1910505652"/>
+        <p14:creationId xmlns:p14="http://schemas.microsoft.com/office/powerpoint/2010/main" val="2393988412"/>
       </p:ext>
     </p:extLst>
   </p:cSld>
@@ -3619,7 +3619,7 @@
           <p:cNvPr id="2" name="テキスト ボックス 1">
             <a:extLst>
               <a:ext uri="{FF2B5EF4-FFF2-40B4-BE49-F238E27FC236}">
-                <a16:creationId xmlns:a16="http://schemas.microsoft.com/office/drawing/2014/main" id="{B33562C9-F76A-96B2-4B05-221B35CFB2D4}"/>
+                <a16:creationId xmlns:a16="http://schemas.microsoft.com/office/drawing/2014/main" id="{4186227D-9293-32F2-908C-67B5C124115E}"/>
               </a:ext>
             </a:extLst>
           </p:cNvPr>
@@ -3665,7 +3665,7 @@
           <p:cNvPr id="3" name="テキスト ボックス 2">
             <a:extLst>
               <a:ext uri="{FF2B5EF4-FFF2-40B4-BE49-F238E27FC236}">
-                <a16:creationId xmlns:a16="http://schemas.microsoft.com/office/drawing/2014/main" id="{05C6A507-79E4-61BC-A0F5-D60E37114134}"/>
+                <a16:creationId xmlns:a16="http://schemas.microsoft.com/office/drawing/2014/main" id="{651834EE-AD3A-390C-995F-7FA1BF8DB7DC}"/>
               </a:ext>
             </a:extLst>
           </p:cNvPr>
@@ -3714,7 +3714,7 @@
           <p:cNvPr id="4" name="テキスト ボックス 3">
             <a:extLst>
               <a:ext uri="{FF2B5EF4-FFF2-40B4-BE49-F238E27FC236}">
-                <a16:creationId xmlns:a16="http://schemas.microsoft.com/office/drawing/2014/main" id="{160E1159-77C2-1FFB-9D08-E1DDD50DE1F5}"/>
+                <a16:creationId xmlns:a16="http://schemas.microsoft.com/office/drawing/2014/main" id="{96BB6837-1C69-5891-42E1-761489C057BD}"/>
               </a:ext>
             </a:extLst>
           </p:cNvPr>
@@ -3754,7 +3754,7 @@
           <p:cNvPr id="5" name="テキスト ボックス 4">
             <a:extLst>
               <a:ext uri="{FF2B5EF4-FFF2-40B4-BE49-F238E27FC236}">
-                <a16:creationId xmlns:a16="http://schemas.microsoft.com/office/drawing/2014/main" id="{BA8CB780-9BC8-50A6-55D7-657EAA078D7D}"/>
+                <a16:creationId xmlns:a16="http://schemas.microsoft.com/office/drawing/2014/main" id="{78C488EE-E90E-434E-C978-49CF17FF8711}"/>
               </a:ext>
             </a:extLst>
           </p:cNvPr>
@@ -3801,7 +3801,7 @@
             <a:hlinkClick r:id="" action="ppaction://media"/>
             <a:extLst>
               <a:ext uri="{FF2B5EF4-FFF2-40B4-BE49-F238E27FC236}">
-                <a16:creationId xmlns:a16="http://schemas.microsoft.com/office/drawing/2014/main" id="{1BD46E00-7645-AB8F-3699-D2C40423778C}"/>
+                <a16:creationId xmlns:a16="http://schemas.microsoft.com/office/drawing/2014/main" id="{DA20E6A2-02E2-0CEF-EA92-997177726C31}"/>
               </a:ext>
             </a:extLst>
           </p:cNvPr>
@@ -3836,7 +3836,7 @@
     </p:spTree>
     <p:extLst>
       <p:ext uri="{BB962C8B-B14F-4D97-AF65-F5344CB8AC3E}">
-        <p14:creationId xmlns:p14="http://schemas.microsoft.com/office/powerpoint/2010/main" val="2923861298"/>
+        <p14:creationId xmlns:p14="http://schemas.microsoft.com/office/powerpoint/2010/main" val="228358873"/>
       </p:ext>
     </p:extLst>
   </p:cSld>
@@ -3960,7 +3960,7 @@
           <p:cNvPr id="2" name="テキスト ボックス 1">
             <a:extLst>
               <a:ext uri="{FF2B5EF4-FFF2-40B4-BE49-F238E27FC236}">
-                <a16:creationId xmlns:a16="http://schemas.microsoft.com/office/drawing/2014/main" id="{B5ABE4AD-C7D0-0BB5-5B36-A097BD94F37B}"/>
+                <a16:creationId xmlns:a16="http://schemas.microsoft.com/office/drawing/2014/main" id="{636780B4-1459-C076-9D14-3FB2493238A9}"/>
               </a:ext>
             </a:extLst>
           </p:cNvPr>
@@ -4006,7 +4006,7 @@
           <p:cNvPr id="3" name="テキスト ボックス 2">
             <a:extLst>
               <a:ext uri="{FF2B5EF4-FFF2-40B4-BE49-F238E27FC236}">
-                <a16:creationId xmlns:a16="http://schemas.microsoft.com/office/drawing/2014/main" id="{504A45D0-6540-1E65-2ED2-B9313A3155FA}"/>
+                <a16:creationId xmlns:a16="http://schemas.microsoft.com/office/drawing/2014/main" id="{0D481421-ED2D-C57D-E59E-02F86F898C03}"/>
               </a:ext>
             </a:extLst>
           </p:cNvPr>
@@ -4046,7 +4046,7 @@
           <p:cNvPr id="4" name="テキスト ボックス 3">
             <a:extLst>
               <a:ext uri="{FF2B5EF4-FFF2-40B4-BE49-F238E27FC236}">
-                <a16:creationId xmlns:a16="http://schemas.microsoft.com/office/drawing/2014/main" id="{19D2A631-4026-12C3-6193-48720FA682F8}"/>
+                <a16:creationId xmlns:a16="http://schemas.microsoft.com/office/drawing/2014/main" id="{656E3059-64A6-6224-ED7A-3C9796DBBAA5}"/>
               </a:ext>
             </a:extLst>
           </p:cNvPr>
@@ -4076,14 +4076,17 @@
                 </a:solidFill>
                 <a:latin typeface="Arial" panose="020B0604020202020204" pitchFamily="34" charset="0"/>
               </a:rPr>
-              <a:t>vinext starter A clean full stack starter running on vinext https://github</a:t>
-            </a:r>
-            <a:endParaRPr kumimoji="1" lang="ja-JP" altLang="en-US" sz="2000">
-              <a:solidFill>
-                <a:srgbClr val="333333"/>
-              </a:solidFill>
-              <a:latin typeface="Arial" panose="020B0604020202020204" pitchFamily="34" charset="0"/>
-            </a:endParaRPr>
+              <a:t>Cosme Stock Alert</a:t>
+            </a:r>
+            <a:r>
+              <a:rPr kumimoji="1" lang="ja-JP" altLang="en-US" sz="2000">
+                <a:solidFill>
+                  <a:srgbClr val="333333"/>
+                </a:solidFill>
+                <a:latin typeface="Arial" panose="020B0604020202020204" pitchFamily="34" charset="0"/>
+              </a:rPr>
+              <a:t>の目的、構成、実装を公開コードから確認できるプロジェクトです。</a:t>
+            </a:r>
           </a:p>
         </p:txBody>
       </p:sp>
@@ -4092,7 +4095,7 @@
           <p:cNvPr id="5" name="テキスト ボックス 4">
             <a:extLst>
               <a:ext uri="{FF2B5EF4-FFF2-40B4-BE49-F238E27FC236}">
-                <a16:creationId xmlns:a16="http://schemas.microsoft.com/office/drawing/2014/main" id="{52D92C75-FECA-0564-F529-B0ABE8D0EB51}"/>
+                <a16:creationId xmlns:a16="http://schemas.microsoft.com/office/drawing/2014/main" id="{D033A175-A954-DC86-93C5-F70EABFC0B68}"/>
               </a:ext>
             </a:extLst>
           </p:cNvPr>
@@ -4139,7 +4142,7 @@
             <a:hlinkClick r:id="" action="ppaction://media"/>
             <a:extLst>
               <a:ext uri="{FF2B5EF4-FFF2-40B4-BE49-F238E27FC236}">
-                <a16:creationId xmlns:a16="http://schemas.microsoft.com/office/drawing/2014/main" id="{D43930C2-5240-C699-E233-3DCA270A04DC}"/>
+                <a16:creationId xmlns:a16="http://schemas.microsoft.com/office/drawing/2014/main" id="{55377EB1-86C1-AC22-CD1F-FC54E47672AD}"/>
               </a:ext>
             </a:extLst>
           </p:cNvPr>
@@ -4174,7 +4177,7 @@
     </p:spTree>
     <p:extLst>
       <p:ext uri="{BB962C8B-B14F-4D97-AF65-F5344CB8AC3E}">
-        <p14:creationId xmlns:p14="http://schemas.microsoft.com/office/powerpoint/2010/main" val="2107224277"/>
+        <p14:creationId xmlns:p14="http://schemas.microsoft.com/office/powerpoint/2010/main" val="797374591"/>
       </p:ext>
     </p:extLst>
   </p:cSld>
@@ -4217,7 +4220,7 @@
                                   <p:childTnLst>
                                     <p:cmd type="call" cmd="playFrom(0.0)">
                                       <p:cBhvr>
-                                        <p:cTn id="6" dur="7955" fill="hold"/>
+                                        <p:cTn id="6" dur="7636" fill="hold"/>
                                         <p:tgtEl>
                                           <p:spTgt spid="6"/>
                                         </p:tgtEl>
@@ -4298,7 +4301,7 @@
           <p:cNvPr id="2" name="テキスト ボックス 1">
             <a:extLst>
               <a:ext uri="{FF2B5EF4-FFF2-40B4-BE49-F238E27FC236}">
-                <a16:creationId xmlns:a16="http://schemas.microsoft.com/office/drawing/2014/main" id="{07E384E3-B8B6-03D4-DBE0-7E1A7850D444}"/>
+                <a16:creationId xmlns:a16="http://schemas.microsoft.com/office/drawing/2014/main" id="{B77CC388-0A50-6661-E7D8-FE08CC8DA1AE}"/>
               </a:ext>
             </a:extLst>
           </p:cNvPr>
@@ -4344,7 +4347,7 @@
           <p:cNvPr id="3" name="テキスト ボックス 2">
             <a:extLst>
               <a:ext uri="{FF2B5EF4-FFF2-40B4-BE49-F238E27FC236}">
-                <a16:creationId xmlns:a16="http://schemas.microsoft.com/office/drawing/2014/main" id="{2D026239-EDE6-5A57-BBBC-01B6FDA052AF}"/>
+                <a16:creationId xmlns:a16="http://schemas.microsoft.com/office/drawing/2014/main" id="{02D0AE69-55AC-8B1E-0775-DDBCFCDAEEAC}"/>
               </a:ext>
             </a:extLst>
           </p:cNvPr>
@@ -4384,7 +4387,7 @@
           <p:cNvPr id="4" name="テキスト ボックス 3">
             <a:extLst>
               <a:ext uri="{FF2B5EF4-FFF2-40B4-BE49-F238E27FC236}">
-                <a16:creationId xmlns:a16="http://schemas.microsoft.com/office/drawing/2014/main" id="{6079AE91-ED12-CBCA-F83F-D76CD7401540}"/>
+                <a16:creationId xmlns:a16="http://schemas.microsoft.com/office/drawing/2014/main" id="{7D918BAA-5DD2-5F69-639B-BA0A7D592FC4}"/>
               </a:ext>
             </a:extLst>
           </p:cNvPr>
@@ -4461,7 +4464,7 @@
           <p:cNvPr id="5" name="テキスト ボックス 4">
             <a:extLst>
               <a:ext uri="{FF2B5EF4-FFF2-40B4-BE49-F238E27FC236}">
-                <a16:creationId xmlns:a16="http://schemas.microsoft.com/office/drawing/2014/main" id="{CE534D32-E43C-4D25-4A8A-1D3E9A8A57F7}"/>
+                <a16:creationId xmlns:a16="http://schemas.microsoft.com/office/drawing/2014/main" id="{C3B647E4-0DA5-7CF6-7D60-B64B1E435C96}"/>
               </a:ext>
             </a:extLst>
           </p:cNvPr>
@@ -4508,7 +4511,7 @@
             <a:hlinkClick r:id="" action="ppaction://media"/>
             <a:extLst>
               <a:ext uri="{FF2B5EF4-FFF2-40B4-BE49-F238E27FC236}">
-                <a16:creationId xmlns:a16="http://schemas.microsoft.com/office/drawing/2014/main" id="{FE030C3D-040C-A085-390B-51F8D536488D}"/>
+                <a16:creationId xmlns:a16="http://schemas.microsoft.com/office/drawing/2014/main" id="{A7A85C6C-9AC2-64BB-1A4F-4A77C1DBDD24}"/>
               </a:ext>
             </a:extLst>
           </p:cNvPr>
@@ -4543,7 +4546,7 @@
     </p:spTree>
     <p:extLst>
       <p:ext uri="{BB962C8B-B14F-4D97-AF65-F5344CB8AC3E}">
-        <p14:creationId xmlns:p14="http://schemas.microsoft.com/office/powerpoint/2010/main" val="3911923952"/>
+        <p14:creationId xmlns:p14="http://schemas.microsoft.com/office/powerpoint/2010/main" val="1024623726"/>
       </p:ext>
     </p:extLst>
   </p:cSld>
@@ -4667,7 +4670,7 @@
           <p:cNvPr id="2" name="テキスト ボックス 1">
             <a:extLst>
               <a:ext uri="{FF2B5EF4-FFF2-40B4-BE49-F238E27FC236}">
-                <a16:creationId xmlns:a16="http://schemas.microsoft.com/office/drawing/2014/main" id="{93A9CB27-E9DE-CB01-21A9-12A2F99D99E4}"/>
+                <a16:creationId xmlns:a16="http://schemas.microsoft.com/office/drawing/2014/main" id="{C98D1C90-CEB2-77C2-6B6F-43179B430447}"/>
               </a:ext>
             </a:extLst>
           </p:cNvPr>
@@ -4713,7 +4716,7 @@
           <p:cNvPr id="3" name="テキスト ボックス 2">
             <a:extLst>
               <a:ext uri="{FF2B5EF4-FFF2-40B4-BE49-F238E27FC236}">
-                <a16:creationId xmlns:a16="http://schemas.microsoft.com/office/drawing/2014/main" id="{5849245A-E066-2CA2-1FE6-80459CADF0FA}"/>
+                <a16:creationId xmlns:a16="http://schemas.microsoft.com/office/drawing/2014/main" id="{29C7499D-F73B-AFD2-856B-592281A4EDA0}"/>
               </a:ext>
             </a:extLst>
           </p:cNvPr>
@@ -4753,7 +4756,7 @@
           <p:cNvPr id="4" name="テキスト ボックス 3">
             <a:extLst>
               <a:ext uri="{FF2B5EF4-FFF2-40B4-BE49-F238E27FC236}">
-                <a16:creationId xmlns:a16="http://schemas.microsoft.com/office/drawing/2014/main" id="{83767F12-FE75-9F07-E520-A88457D580E9}"/>
+                <a16:creationId xmlns:a16="http://schemas.microsoft.com/office/drawing/2014/main" id="{029E29C9-4BA8-8D7C-C9AB-BCDB7CD528FF}"/>
               </a:ext>
             </a:extLst>
           </p:cNvPr>
@@ -4863,7 +4866,7 @@
           <p:cNvPr id="5" name="テキスト ボックス 4">
             <a:extLst>
               <a:ext uri="{FF2B5EF4-FFF2-40B4-BE49-F238E27FC236}">
-                <a16:creationId xmlns:a16="http://schemas.microsoft.com/office/drawing/2014/main" id="{D8E6945F-E84B-20DA-2A19-EDE8FBE409E5}"/>
+                <a16:creationId xmlns:a16="http://schemas.microsoft.com/office/drawing/2014/main" id="{907A645E-6077-7B8A-3575-8C6C9F456226}"/>
               </a:ext>
             </a:extLst>
           </p:cNvPr>
@@ -4910,7 +4913,7 @@
             <a:hlinkClick r:id="" action="ppaction://media"/>
             <a:extLst>
               <a:ext uri="{FF2B5EF4-FFF2-40B4-BE49-F238E27FC236}">
-                <a16:creationId xmlns:a16="http://schemas.microsoft.com/office/drawing/2014/main" id="{C336E7E8-B995-E05A-1EE3-F660BF120895}"/>
+                <a16:creationId xmlns:a16="http://schemas.microsoft.com/office/drawing/2014/main" id="{159A1E67-27FB-0C22-2167-95DF5EE88966}"/>
               </a:ext>
             </a:extLst>
           </p:cNvPr>
@@ -4945,7 +4948,7 @@
     </p:spTree>
     <p:extLst>
       <p:ext uri="{BB962C8B-B14F-4D97-AF65-F5344CB8AC3E}">
-        <p14:creationId xmlns:p14="http://schemas.microsoft.com/office/powerpoint/2010/main" val="3052416119"/>
+        <p14:creationId xmlns:p14="http://schemas.microsoft.com/office/powerpoint/2010/main" val="971778740"/>
       </p:ext>
     </p:extLst>
   </p:cSld>
@@ -5069,7 +5072,7 @@
           <p:cNvPr id="2" name="テキスト ボックス 1">
             <a:extLst>
               <a:ext uri="{FF2B5EF4-FFF2-40B4-BE49-F238E27FC236}">
-                <a16:creationId xmlns:a16="http://schemas.microsoft.com/office/drawing/2014/main" id="{44D36C25-7FF6-E025-8B40-E59A9FEA3503}"/>
+                <a16:creationId xmlns:a16="http://schemas.microsoft.com/office/drawing/2014/main" id="{F962B710-EA0E-12D9-67AF-EAC2218D149C}"/>
               </a:ext>
             </a:extLst>
           </p:cNvPr>
@@ -5115,7 +5118,7 @@
           <p:cNvPr id="3" name="テキスト ボックス 2">
             <a:extLst>
               <a:ext uri="{FF2B5EF4-FFF2-40B4-BE49-F238E27FC236}">
-                <a16:creationId xmlns:a16="http://schemas.microsoft.com/office/drawing/2014/main" id="{476C2FB9-CAE4-6D21-45C7-4AB5D62A58EA}"/>
+                <a16:creationId xmlns:a16="http://schemas.microsoft.com/office/drawing/2014/main" id="{71D3F049-2074-C7DC-A62F-AA57CB7AD2BD}"/>
               </a:ext>
             </a:extLst>
           </p:cNvPr>
@@ -5155,7 +5158,7 @@
           <p:cNvPr id="4" name="テキスト ボックス 3">
             <a:extLst>
               <a:ext uri="{FF2B5EF4-FFF2-40B4-BE49-F238E27FC236}">
-                <a16:creationId xmlns:a16="http://schemas.microsoft.com/office/drawing/2014/main" id="{1C54EACB-B028-605F-7A23-4EBF27312A5D}"/>
+                <a16:creationId xmlns:a16="http://schemas.microsoft.com/office/drawing/2014/main" id="{8535E6F6-A261-E988-59C3-5D2FC6C87835}"/>
               </a:ext>
             </a:extLst>
           </p:cNvPr>
@@ -5179,20 +5182,14 @@
           <a:lstStyle/>
           <a:p>
             <a:r>
-              <a:rPr kumimoji="1" lang="en-US" altLang="ja-JP" sz="2000">
+              <a:rPr kumimoji="1" lang="ja-JP" altLang="en-US" sz="2000">
                 <a:solidFill>
                   <a:srgbClr val="333333"/>
                 </a:solidFill>
                 <a:latin typeface="Arial" panose="020B0604020202020204" pitchFamily="34" charset="0"/>
               </a:rPr>
-              <a:t>Configure private site hosting</a:t>
-            </a:r>
-            <a:endParaRPr kumimoji="1" lang="ja-JP" altLang="en-US" sz="2000">
-              <a:solidFill>
-                <a:srgbClr val="333333"/>
-              </a:solidFill>
-              <a:latin typeface="Arial" panose="020B0604020202020204" pitchFamily="34" charset="0"/>
-            </a:endParaRPr>
+              <a:t>直近のコミットでは、実装の見直しと継続的な改善が行われました。</a:t>
+            </a:r>
           </a:p>
         </p:txBody>
       </p:sp>
@@ -5201,7 +5198,7 @@
           <p:cNvPr id="5" name="テキスト ボックス 4">
             <a:extLst>
               <a:ext uri="{FF2B5EF4-FFF2-40B4-BE49-F238E27FC236}">
-                <a16:creationId xmlns:a16="http://schemas.microsoft.com/office/drawing/2014/main" id="{B961C15D-C50C-4DA8-4234-B2E56B2742EB}"/>
+                <a16:creationId xmlns:a16="http://schemas.microsoft.com/office/drawing/2014/main" id="{198DFFF5-6FEB-BA09-7D94-C0B307195B6C}"/>
               </a:ext>
             </a:extLst>
           </p:cNvPr>
@@ -5248,7 +5245,7 @@
             <a:hlinkClick r:id="" action="ppaction://media"/>
             <a:extLst>
               <a:ext uri="{FF2B5EF4-FFF2-40B4-BE49-F238E27FC236}">
-                <a16:creationId xmlns:a16="http://schemas.microsoft.com/office/drawing/2014/main" id="{5641C74A-7862-995C-63FB-DB8B9B3CA00E}"/>
+                <a16:creationId xmlns:a16="http://schemas.microsoft.com/office/drawing/2014/main" id="{3421868A-3E2C-73B1-47D4-C1C04E37099F}"/>
               </a:ext>
             </a:extLst>
           </p:cNvPr>
@@ -5283,7 +5280,7 @@
     </p:spTree>
     <p:extLst>
       <p:ext uri="{BB962C8B-B14F-4D97-AF65-F5344CB8AC3E}">
-        <p14:creationId xmlns:p14="http://schemas.microsoft.com/office/powerpoint/2010/main" val="556264252"/>
+        <p14:creationId xmlns:p14="http://schemas.microsoft.com/office/powerpoint/2010/main" val="1134199162"/>
       </p:ext>
     </p:extLst>
   </p:cSld>
@@ -5326,7 +5323,7 @@
                                   <p:childTnLst>
                                     <p:cmd type="call" cmd="playFrom(0.0)">
                                       <p:cBhvr>
-                                        <p:cTn id="6" dur="6621" fill="hold"/>
+                                        <p:cTn id="6" dur="6076" fill="hold"/>
                                         <p:tgtEl>
                                           <p:spTgt spid="6"/>
                                         </p:tgtEl>
@@ -5407,7 +5404,7 @@
           <p:cNvPr id="2" name="テキスト ボックス 1">
             <a:extLst>
               <a:ext uri="{FF2B5EF4-FFF2-40B4-BE49-F238E27FC236}">
-                <a16:creationId xmlns:a16="http://schemas.microsoft.com/office/drawing/2014/main" id="{301C3BCE-2393-0BF3-D547-75539048CD20}"/>
+                <a16:creationId xmlns:a16="http://schemas.microsoft.com/office/drawing/2014/main" id="{4BA495FA-4A62-2D54-8DF8-66F9451F1CDB}"/>
               </a:ext>
             </a:extLst>
           </p:cNvPr>
@@ -5453,7 +5450,7 @@
           <p:cNvPr id="3" name="テキスト ボックス 2">
             <a:extLst>
               <a:ext uri="{FF2B5EF4-FFF2-40B4-BE49-F238E27FC236}">
-                <a16:creationId xmlns:a16="http://schemas.microsoft.com/office/drawing/2014/main" id="{24E2DACF-37F2-77CE-1B0D-52B87D82975E}"/>
+                <a16:creationId xmlns:a16="http://schemas.microsoft.com/office/drawing/2014/main" id="{252D3767-EB75-CE74-EF17-822851DFDCC6}"/>
               </a:ext>
             </a:extLst>
           </p:cNvPr>
@@ -5493,7 +5490,7 @@
           <p:cNvPr id="4" name="テキスト ボックス 3">
             <a:extLst>
               <a:ext uri="{FF2B5EF4-FFF2-40B4-BE49-F238E27FC236}">
-                <a16:creationId xmlns:a16="http://schemas.microsoft.com/office/drawing/2014/main" id="{633167CA-B983-B136-7CB3-A3CDCE08B1B1}"/>
+                <a16:creationId xmlns:a16="http://schemas.microsoft.com/office/drawing/2014/main" id="{A47EDF85-1A70-CF0B-B64B-070620841655}"/>
               </a:ext>
             </a:extLst>
           </p:cNvPr>
@@ -5558,7 +5555,7 @@
           <p:cNvPr id="5" name="テキスト ボックス 4">
             <a:extLst>
               <a:ext uri="{FF2B5EF4-FFF2-40B4-BE49-F238E27FC236}">
-                <a16:creationId xmlns:a16="http://schemas.microsoft.com/office/drawing/2014/main" id="{BA00AAEB-53B9-FBE5-F3CF-4028BA63406C}"/>
+                <a16:creationId xmlns:a16="http://schemas.microsoft.com/office/drawing/2014/main" id="{62BB1B57-D8AA-E5B6-7EE1-7B22E537CEBF}"/>
               </a:ext>
             </a:extLst>
           </p:cNvPr>
@@ -5605,7 +5602,7 @@
             <a:hlinkClick r:id="" action="ppaction://media"/>
             <a:extLst>
               <a:ext uri="{FF2B5EF4-FFF2-40B4-BE49-F238E27FC236}">
-                <a16:creationId xmlns:a16="http://schemas.microsoft.com/office/drawing/2014/main" id="{ED12586E-F5A2-B5E8-7479-B6DA1A2330BA}"/>
+                <a16:creationId xmlns:a16="http://schemas.microsoft.com/office/drawing/2014/main" id="{1D9E11C5-8827-F443-FF66-934A3B3F5136}"/>
               </a:ext>
             </a:extLst>
           </p:cNvPr>
@@ -5640,7 +5637,7 @@
     </p:spTree>
     <p:extLst>
       <p:ext uri="{BB962C8B-B14F-4D97-AF65-F5344CB8AC3E}">
-        <p14:creationId xmlns:p14="http://schemas.microsoft.com/office/powerpoint/2010/main" val="2011547187"/>
+        <p14:creationId xmlns:p14="http://schemas.microsoft.com/office/powerpoint/2010/main" val="2585191641"/>
       </p:ext>
     </p:extLst>
   </p:cSld>
